--- a/docs/s7-leadership-overview.pptx
+++ b/docs/s7-leadership-overview.pptx
@@ -3110,7 +3110,7 @@
             <a:avLst/>
           </a:prstGeom>
           <a:solidFill>
-            <a:srgbClr val="1F3864"/>
+            <a:srgbClr val="36362F"/>
           </a:solidFill>
           <a:ln>
             <a:noFill/>
@@ -3148,7 +3148,7 @@
         <p:spPr>
           <a:xfrm>
             <a:off x="914400" y="2331720"/>
-            <a:ext cx="10332720" cy="2011680"/>
+            <a:ext cx="10332720" cy="685800"/>
           </a:xfrm>
           <a:prstGeom prst="rect">
             <a:avLst/>
@@ -3156,38 +3156,53 @@
           <a:noFill/>
         </p:spPr>
         <p:txBody>
-          <a:bodyPr wrap="square">
+          <a:bodyPr wrap="square" anchor="t" lIns="0" rIns="0" tIns="0" bIns="0">
             <a:spAutoFit/>
           </a:bodyPr>
           <a:lstStyle/>
           <a:p>
-            <a:pPr algn="l">
-              <a:spcAft>
-                <a:spcPts val="1400"/>
-              </a:spcAft>
-            </a:pPr>
+            <a:pPr algn="l"/>
             <a:r>
               <a:rPr sz="5400" b="1">
                 <a:solidFill>
                   <a:srgbClr val="FFFFFF"/>
                 </a:solidFill>
-                <a:latin typeface="Calibri"/>
+                <a:latin typeface="Source Sans Pro"/>
               </a:rPr>
               <a:t>AI-Assisted Delivery</a:t>
             </a:r>
           </a:p>
-          <a:p>
-            <a:pPr algn="l">
-              <a:spcAft>
-                <a:spcPts val="800"/>
-              </a:spcAft>
-            </a:pPr>
+        </p:txBody>
+      </p:sp>
+      <p:sp>
+        <p:nvSpPr>
+          <p:cNvPr id="4" name="TextBox 3"/>
+          <p:cNvSpPr txBox="1"/>
+          <p:nvPr/>
+        </p:nvSpPr>
+        <p:spPr>
+          <a:xfrm>
+            <a:off x="914400" y="3017520"/>
+            <a:ext cx="10332720" cy="685800"/>
+          </a:xfrm>
+          <a:prstGeom prst="rect">
+            <a:avLst/>
+          </a:prstGeom>
+          <a:noFill/>
+        </p:spPr>
+        <p:txBody>
+          <a:bodyPr wrap="square" anchor="t" lIns="0" rIns="0" tIns="0" bIns="0">
+            <a:spAutoFit/>
+          </a:bodyPr>
+          <a:lstStyle/>
+          <a:p>
+            <a:pPr algn="l"/>
             <a:r>
               <a:rPr sz="2400" b="0">
                 <a:solidFill>
-                  <a:srgbClr val="BDD0E9"/>
-                </a:solidFill>
-                <a:latin typeface="Calibri"/>
+                  <a:srgbClr val="E3C9CE"/>
+                </a:solidFill>
+                <a:latin typeface="Source Sans Pro"/>
               </a:rPr>
               <a:t>From business requirement to production release — with humans in control</a:t>
             </a:r>
@@ -3196,7 +3211,51 @@
       </p:sp>
       <p:sp>
         <p:nvSpPr>
-          <p:cNvPr id="4" name="TextBox 3"/>
+          <p:cNvPr id="5" name="Rectangle 4"/>
+          <p:cNvSpPr/>
+          <p:nvPr/>
+        </p:nvSpPr>
+        <p:spPr>
+          <a:xfrm>
+            <a:off x="914400" y="5750000"/>
+            <a:ext cx="2011680" cy="38100"/>
+          </a:xfrm>
+          <a:prstGeom prst="rect">
+            <a:avLst/>
+          </a:prstGeom>
+          <a:solidFill>
+            <a:srgbClr val="A20A29"/>
+          </a:solidFill>
+          <a:ln>
+            <a:noFill/>
+          </a:ln>
+          <a:effectLst/>
+        </p:spPr>
+        <p:style>
+          <a:lnRef idx="1">
+            <a:schemeClr val="accent1"/>
+          </a:lnRef>
+          <a:fillRef idx="3">
+            <a:schemeClr val="accent1"/>
+          </a:fillRef>
+          <a:effectRef idx="2">
+            <a:schemeClr val="accent1"/>
+          </a:effectRef>
+          <a:fontRef idx="minor">
+            <a:schemeClr val="lt1"/>
+          </a:fontRef>
+        </p:style>
+        <p:txBody>
+          <a:bodyPr rtlCol="0" anchor="ctr"/>
+          <a:lstStyle/>
+          <a:p>
+            <a:pPr algn="ctr"/>
+          </a:p>
+        </p:txBody>
+      </p:sp>
+      <p:sp>
+        <p:nvSpPr>
+          <p:cNvPr id="6" name="TextBox 5"/>
           <p:cNvSpPr txBox="1"/>
           <p:nvPr/>
         </p:nvSpPr>
@@ -3211,22 +3270,18 @@
           <a:noFill/>
         </p:spPr>
         <p:txBody>
-          <a:bodyPr wrap="square">
+          <a:bodyPr wrap="square" anchor="t" lIns="0" rIns="0" tIns="0" bIns="0">
             <a:spAutoFit/>
           </a:bodyPr>
           <a:lstStyle/>
           <a:p>
-            <a:pPr algn="l">
-              <a:spcAft>
-                <a:spcPts val="800"/>
-              </a:spcAft>
-            </a:pPr>
+            <a:pPr algn="l"/>
             <a:r>
               <a:rPr sz="1500" b="0">
                 <a:solidFill>
-                  <a:srgbClr val="8FA8C8"/>
-                </a:solidFill>
-                <a:latin typeface="Calibri"/>
+                  <a:srgbClr val="B8A9A0"/>
+                </a:solidFill>
+                <a:latin typeface="Source Sans Pro"/>
               </a:rPr>
               <a:t>S7 · Delivery Scope · August 2026</a:t>
             </a:r>
@@ -3253,59 +3308,20 @@
       <p:grpSpPr/>
       <p:sp>
         <p:nvSpPr>
-          <p:cNvPr id="2" name="TextBox 1"/>
-          <p:cNvSpPr txBox="1"/>
-          <p:nvPr/>
-        </p:nvSpPr>
-        <p:spPr>
-          <a:xfrm>
-            <a:off x="548640" y="320040"/>
-            <a:ext cx="11064240" cy="685800"/>
-          </a:xfrm>
-          <a:prstGeom prst="rect">
-            <a:avLst/>
-          </a:prstGeom>
-          <a:noFill/>
-        </p:spPr>
-        <p:txBody>
-          <a:bodyPr wrap="square">
-            <a:spAutoFit/>
-          </a:bodyPr>
-          <a:lstStyle/>
-          <a:p>
-            <a:pPr algn="l">
-              <a:spcAft>
-                <a:spcPts val="800"/>
-              </a:spcAft>
-            </a:pPr>
-            <a:r>
-              <a:rPr sz="3400" b="1">
-                <a:solidFill>
-                  <a:srgbClr val="1F3864"/>
-                </a:solidFill>
-                <a:latin typeface="Calibri"/>
-              </a:rPr>
-              <a:t>The idea, in one sentence</a:t>
-            </a:r>
-          </a:p>
-        </p:txBody>
-      </p:sp>
-      <p:sp>
-        <p:nvSpPr>
-          <p:cNvPr id="3" name="Rectangle 2"/>
+          <p:cNvPr id="2" name="Rectangle 1"/>
           <p:cNvSpPr/>
           <p:nvPr/>
         </p:nvSpPr>
         <p:spPr>
           <a:xfrm>
-            <a:off x="594360" y="987552"/>
-            <a:ext cx="2011680" cy="38100"/>
+            <a:off x="0" y="0"/>
+            <a:ext cx="12191695" cy="6858000"/>
           </a:xfrm>
           <a:prstGeom prst="rect">
             <a:avLst/>
           </a:prstGeom>
           <a:solidFill>
-            <a:srgbClr val="2E74B5"/>
+            <a:srgbClr val="F0F0EC"/>
           </a:solidFill>
           <a:ln>
             <a:noFill/>
@@ -3336,7 +3352,86 @@
       </p:sp>
       <p:sp>
         <p:nvSpPr>
-          <p:cNvPr id="4" name="TextBox 3"/>
+          <p:cNvPr id="3" name="TextBox 2"/>
+          <p:cNvSpPr txBox="1"/>
+          <p:nvPr/>
+        </p:nvSpPr>
+        <p:spPr>
+          <a:xfrm>
+            <a:off x="548640" y="320040"/>
+            <a:ext cx="11064240" cy="685800"/>
+          </a:xfrm>
+          <a:prstGeom prst="rect">
+            <a:avLst/>
+          </a:prstGeom>
+          <a:noFill/>
+        </p:spPr>
+        <p:txBody>
+          <a:bodyPr wrap="square" anchor="t" lIns="0" rIns="0" tIns="0" bIns="0">
+            <a:spAutoFit/>
+          </a:bodyPr>
+          <a:lstStyle/>
+          <a:p>
+            <a:pPr algn="l"/>
+            <a:r>
+              <a:rPr sz="3400" b="1">
+                <a:solidFill>
+                  <a:srgbClr val="36362F"/>
+                </a:solidFill>
+                <a:latin typeface="Source Sans Pro"/>
+              </a:rPr>
+              <a:t>The idea, in one sentence</a:t>
+            </a:r>
+          </a:p>
+        </p:txBody>
+      </p:sp>
+      <p:sp>
+        <p:nvSpPr>
+          <p:cNvPr id="4" name="Rectangle 3"/>
+          <p:cNvSpPr/>
+          <p:nvPr/>
+        </p:nvSpPr>
+        <p:spPr>
+          <a:xfrm>
+            <a:off x="594360" y="987552"/>
+            <a:ext cx="732536" cy="38100"/>
+          </a:xfrm>
+          <a:prstGeom prst="rect">
+            <a:avLst/>
+          </a:prstGeom>
+          <a:solidFill>
+            <a:srgbClr val="A20A29"/>
+          </a:solidFill>
+          <a:ln>
+            <a:noFill/>
+          </a:ln>
+          <a:effectLst/>
+        </p:spPr>
+        <p:style>
+          <a:lnRef idx="1">
+            <a:schemeClr val="accent1"/>
+          </a:lnRef>
+          <a:fillRef idx="3">
+            <a:schemeClr val="accent1"/>
+          </a:fillRef>
+          <a:effectRef idx="2">
+            <a:schemeClr val="accent1"/>
+          </a:effectRef>
+          <a:fontRef idx="minor">
+            <a:schemeClr val="lt1"/>
+          </a:fontRef>
+        </p:style>
+        <p:txBody>
+          <a:bodyPr rtlCol="0" anchor="ctr"/>
+          <a:lstStyle/>
+          <a:p>
+            <a:pPr algn="ctr"/>
+          </a:p>
+        </p:txBody>
+      </p:sp>
+      <p:sp>
+        <p:nvSpPr>
+          <p:cNvPr id="5" name="TextBox 4"/>
           <p:cNvSpPr txBox="1"/>
           <p:nvPr/>
         </p:nvSpPr>
@@ -3351,54 +3446,42 @@
           <a:noFill/>
         </p:spPr>
         <p:txBody>
-          <a:bodyPr wrap="square">
+          <a:bodyPr wrap="square" anchor="t" lIns="0" rIns="0" tIns="0" bIns="0">
             <a:spAutoFit/>
           </a:bodyPr>
           <a:lstStyle/>
           <a:p>
-            <a:pPr algn="ctr">
-              <a:spcAft>
-                <a:spcPts val="1000"/>
-              </a:spcAft>
-            </a:pPr>
+            <a:pPr algn="l"/>
             <a:r>
               <a:rPr sz="3200" b="1">
                 <a:solidFill>
-                  <a:srgbClr val="1F3864"/>
-                </a:solidFill>
-                <a:latin typeface="Calibri"/>
+                  <a:srgbClr val="36362F"/>
+                </a:solidFill>
+                <a:latin typeface="Source Sans Pro"/>
               </a:rPr>
               <a:t>AI does the heavy lifting of delivery —</a:t>
             </a:r>
           </a:p>
           <a:p>
-            <a:pPr algn="ctr">
-              <a:spcAft>
-                <a:spcPts val="1000"/>
-              </a:spcAft>
-            </a:pPr>
+            <a:pPr algn="l"/>
             <a:r>
               <a:rPr sz="2600" b="0">
                 <a:solidFill>
-                  <a:srgbClr val="2E74B5"/>
-                </a:solidFill>
-                <a:latin typeface="Calibri"/>
+                  <a:srgbClr val="7A0820"/>
+                </a:solidFill>
+                <a:latin typeface="Source Sans Pro"/>
               </a:rPr>
               <a:t>analysis, design, stories, code, tests, documentation —</a:t>
             </a:r>
           </a:p>
           <a:p>
-            <a:pPr algn="ctr">
-              <a:spcAft>
-                <a:spcPts val="800"/>
-              </a:spcAft>
-            </a:pPr>
+            <a:pPr algn="l"/>
             <a:r>
               <a:rPr sz="3200" b="1">
                 <a:solidFill>
-                  <a:srgbClr val="1F3864"/>
-                </a:solidFill>
-                <a:latin typeface="Calibri"/>
+                  <a:srgbClr val="36362F"/>
+                </a:solidFill>
+                <a:latin typeface="Source Sans Pro"/>
               </a:rPr>
               <a:t>and nothing reaches production without passing our checks.</a:t>
             </a:r>
@@ -3407,7 +3490,7 @@
       </p:sp>
       <p:sp>
         <p:nvSpPr>
-          <p:cNvPr id="5" name="TextBox 4"/>
+          <p:cNvPr id="6" name="TextBox 5"/>
           <p:cNvSpPr txBox="1"/>
           <p:nvPr/>
         </p:nvSpPr>
@@ -3422,22 +3505,18 @@
           <a:noFill/>
         </p:spPr>
         <p:txBody>
-          <a:bodyPr wrap="square">
+          <a:bodyPr wrap="square" anchor="t" lIns="0" rIns="0" tIns="0" bIns="0">
             <a:spAutoFit/>
           </a:bodyPr>
           <a:lstStyle/>
           <a:p>
-            <a:pPr algn="ctr">
-              <a:spcAft>
-                <a:spcPts val="800"/>
-              </a:spcAft>
-            </a:pPr>
+            <a:pPr algn="l"/>
             <a:r>
               <a:rPr sz="1900" b="0">
                 <a:solidFill>
-                  <a:srgbClr val="595959"/>
-                </a:solidFill>
-                <a:latin typeface="Calibri"/>
+                  <a:srgbClr val="525146"/>
+                </a:solidFill>
+                <a:latin typeface="Source Sans Pro"/>
               </a:rPr>
               <a:t>Not a black box. Every step is gated, logged, and traceable.</a:t>
             </a:r>
@@ -3464,59 +3543,20 @@
       <p:grpSpPr/>
       <p:sp>
         <p:nvSpPr>
-          <p:cNvPr id="2" name="TextBox 1"/>
-          <p:cNvSpPr txBox="1"/>
-          <p:nvPr/>
-        </p:nvSpPr>
-        <p:spPr>
-          <a:xfrm>
-            <a:off x="548640" y="320040"/>
-            <a:ext cx="11064240" cy="685800"/>
-          </a:xfrm>
-          <a:prstGeom prst="rect">
-            <a:avLst/>
-          </a:prstGeom>
-          <a:noFill/>
-        </p:spPr>
-        <p:txBody>
-          <a:bodyPr wrap="square">
-            <a:spAutoFit/>
-          </a:bodyPr>
-          <a:lstStyle/>
-          <a:p>
-            <a:pPr algn="l">
-              <a:spcAft>
-                <a:spcPts val="800"/>
-              </a:spcAft>
-            </a:pPr>
-            <a:r>
-              <a:rPr sz="3400" b="1">
-                <a:solidFill>
-                  <a:srgbClr val="1F3864"/>
-                </a:solidFill>
-                <a:latin typeface="Calibri"/>
-              </a:rPr>
-              <a:t>How work will flow</a:t>
-            </a:r>
-          </a:p>
-        </p:txBody>
-      </p:sp>
-      <p:sp>
-        <p:nvSpPr>
-          <p:cNvPr id="3" name="Rectangle 2"/>
+          <p:cNvPr id="2" name="Rectangle 1"/>
           <p:cNvSpPr/>
           <p:nvPr/>
         </p:nvSpPr>
         <p:spPr>
           <a:xfrm>
-            <a:off x="594360" y="987552"/>
-            <a:ext cx="2011680" cy="38100"/>
+            <a:off x="0" y="0"/>
+            <a:ext cx="12191695" cy="6858000"/>
           </a:xfrm>
           <a:prstGeom prst="rect">
             <a:avLst/>
           </a:prstGeom>
           <a:solidFill>
-            <a:srgbClr val="2E74B5"/>
+            <a:srgbClr val="F0F0EC"/>
           </a:solidFill>
           <a:ln>
             <a:noFill/>
@@ -3547,14 +3587,14 @@
       </p:sp>
       <p:sp>
         <p:nvSpPr>
-          <p:cNvPr id="4" name="TextBox 3"/>
+          <p:cNvPr id="3" name="TextBox 2"/>
           <p:cNvSpPr txBox="1"/>
           <p:nvPr/>
         </p:nvSpPr>
         <p:spPr>
           <a:xfrm>
-            <a:off x="548640" y="1115568"/>
-            <a:ext cx="11064240" cy="457200"/>
+            <a:off x="548640" y="320040"/>
+            <a:ext cx="11064240" cy="685800"/>
           </a:xfrm>
           <a:prstGeom prst="rect">
             <a:avLst/>
@@ -3562,44 +3602,40 @@
           <a:noFill/>
         </p:spPr>
         <p:txBody>
-          <a:bodyPr wrap="square">
+          <a:bodyPr wrap="square" anchor="t" lIns="0" rIns="0" tIns="0" bIns="0">
             <a:spAutoFit/>
           </a:bodyPr>
           <a:lstStyle/>
           <a:p>
-            <a:pPr algn="l">
-              <a:spcAft>
-                <a:spcPts val="800"/>
-              </a:spcAft>
-            </a:pPr>
-            <a:r>
-              <a:rPr sz="1600" b="0">
-                <a:solidFill>
-                  <a:srgbClr val="595959"/>
-                </a:solidFill>
-                <a:latin typeface="Calibri"/>
+            <a:pPr algn="l"/>
+            <a:r>
+              <a:rPr sz="3400" b="1">
+                <a:solidFill>
+                  <a:srgbClr val="36362F"/>
+                </a:solidFill>
+                <a:latin typeface="Source Sans Pro"/>
               </a:rPr>
-              <a:t>One pipeline, start to finish</a:t>
-            </a:r>
-          </a:p>
-        </p:txBody>
-      </p:sp>
-      <p:sp>
-        <p:nvSpPr>
-          <p:cNvPr id="5" name="Rounded Rectangle 4"/>
+              <a:t>How work will flow</a:t>
+            </a:r>
+          </a:p>
+        </p:txBody>
+      </p:sp>
+      <p:sp>
+        <p:nvSpPr>
+          <p:cNvPr id="4" name="Rectangle 3"/>
           <p:cNvSpPr/>
           <p:nvPr/>
         </p:nvSpPr>
         <p:spPr>
           <a:xfrm>
-            <a:off x="502920" y="2423160"/>
-            <a:ext cx="1298448" cy="960120"/>
-          </a:xfrm>
-          <a:prstGeom prst="roundRect">
+            <a:off x="594360" y="987552"/>
+            <a:ext cx="732536" cy="38100"/>
+          </a:xfrm>
+          <a:prstGeom prst="rect">
             <a:avLst/>
           </a:prstGeom>
           <a:solidFill>
-            <a:srgbClr val="2E74B5"/>
+            <a:srgbClr val="A20A29"/>
           </a:solidFill>
           <a:ln>
             <a:noFill/>
@@ -3621,39 +3657,64 @@
           </a:fontRef>
         </p:style>
         <p:txBody>
-          <a:bodyPr rtlCol="0" anchor="ctr" wrap="square" lIns="45720" rIns="45720"/>
+          <a:bodyPr rtlCol="0" anchor="ctr"/>
           <a:lstStyle/>
           <a:p>
             <a:pPr algn="ctr"/>
-            <a:r>
-              <a:rPr sz="1300" b="1">
-                <a:solidFill>
-                  <a:srgbClr val="FFFFFF"/>
-                </a:solidFill>
-                <a:latin typeface="Calibri"/>
+          </a:p>
+        </p:txBody>
+      </p:sp>
+      <p:sp>
+        <p:nvSpPr>
+          <p:cNvPr id="5" name="TextBox 4"/>
+          <p:cNvSpPr txBox="1"/>
+          <p:nvPr/>
+        </p:nvSpPr>
+        <p:spPr>
+          <a:xfrm>
+            <a:off x="548640" y="1115568"/>
+            <a:ext cx="11064240" cy="457200"/>
+          </a:xfrm>
+          <a:prstGeom prst="rect">
+            <a:avLst/>
+          </a:prstGeom>
+          <a:noFill/>
+        </p:spPr>
+        <p:txBody>
+          <a:bodyPr wrap="square" anchor="t" lIns="0" rIns="0" tIns="0" bIns="0">
+            <a:spAutoFit/>
+          </a:bodyPr>
+          <a:lstStyle/>
+          <a:p>
+            <a:pPr algn="l"/>
+            <a:r>
+              <a:rPr sz="1600" b="0">
+                <a:solidFill>
+                  <a:srgbClr val="525146"/>
+                </a:solidFill>
+                <a:latin typeface="Source Sans Pro"/>
               </a:rPr>
-              <a:t>Business
-requirement</a:t>
-            </a:r>
-          </a:p>
-        </p:txBody>
-      </p:sp>
-      <p:sp>
-        <p:nvSpPr>
-          <p:cNvPr id="6" name="Right Arrow 5"/>
+              <a:t>One pipeline, start to finish</a:t>
+            </a:r>
+          </a:p>
+        </p:txBody>
+      </p:sp>
+      <p:sp>
+        <p:nvSpPr>
+          <p:cNvPr id="6" name="Rectangle 5"/>
           <p:cNvSpPr/>
           <p:nvPr/>
         </p:nvSpPr>
         <p:spPr>
           <a:xfrm>
-            <a:off x="1764792" y="2779776"/>
-            <a:ext cx="237744" cy="256032"/>
-          </a:xfrm>
-          <a:prstGeom prst="rightArrow">
+            <a:off x="502920" y="2423160"/>
+            <a:ext cx="1298448" cy="960120"/>
+          </a:xfrm>
+          <a:prstGeom prst="rect">
             <a:avLst/>
           </a:prstGeom>
           <a:solidFill>
-            <a:srgbClr val="AFB8C4"/>
+            <a:srgbClr val="A20A29"/>
           </a:solidFill>
           <a:ln>
             <a:noFill/>
@@ -3684,20 +3745,56 @@
       </p:sp>
       <p:sp>
         <p:nvSpPr>
-          <p:cNvPr id="7" name="Rounded Rectangle 6"/>
+          <p:cNvPr id="7" name="TextBox 6"/>
+          <p:cNvSpPr txBox="1"/>
+          <p:nvPr/>
+        </p:nvSpPr>
+        <p:spPr>
+          <a:xfrm>
+            <a:off x="502920" y="2423160"/>
+            <a:ext cx="1298448" cy="960120"/>
+          </a:xfrm>
+          <a:prstGeom prst="rect">
+            <a:avLst/>
+          </a:prstGeom>
+          <a:noFill/>
+        </p:spPr>
+        <p:txBody>
+          <a:bodyPr wrap="square" anchor="ctr" lIns="0" rIns="0" tIns="0" bIns="0">
+            <a:spAutoFit/>
+          </a:bodyPr>
+          <a:lstStyle/>
+          <a:p>
+            <a:pPr algn="ctr"/>
+            <a:r>
+              <a:rPr sz="1300" b="1">
+                <a:solidFill>
+                  <a:srgbClr val="FFFFFF"/>
+                </a:solidFill>
+                <a:latin typeface="Source Sans Pro"/>
+              </a:rPr>
+              <a:t>Business
+requirement</a:t>
+            </a:r>
+          </a:p>
+        </p:txBody>
+      </p:sp>
+      <p:sp>
+        <p:nvSpPr>
+          <p:cNvPr id="8" name="Right Arrow 7"/>
           <p:cNvSpPr/>
           <p:nvPr/>
         </p:nvSpPr>
         <p:spPr>
           <a:xfrm>
-            <a:off x="1965960" y="2423160"/>
-            <a:ext cx="1298448" cy="960120"/>
-          </a:xfrm>
-          <a:prstGeom prst="roundRect">
+            <a:off x="1801368" y="2779776"/>
+            <a:ext cx="237744" cy="256032"/>
+          </a:xfrm>
+          <a:prstGeom prst="rightArrow">
             <a:avLst/>
           </a:prstGeom>
           <a:solidFill>
-            <a:srgbClr val="2E74B5"/>
+            <a:srgbClr val="85847A"/>
           </a:solidFill>
           <a:ln>
             <a:noFill/>
@@ -3719,39 +3816,29 @@
           </a:fontRef>
         </p:style>
         <p:txBody>
-          <a:bodyPr rtlCol="0" anchor="ctr" wrap="square" lIns="45720" rIns="45720"/>
+          <a:bodyPr rtlCol="0" anchor="ctr"/>
           <a:lstStyle/>
           <a:p>
             <a:pPr algn="ctr"/>
-            <a:r>
-              <a:rPr sz="1300" b="1">
-                <a:solidFill>
-                  <a:srgbClr val="FFFFFF"/>
-                </a:solidFill>
-                <a:latin typeface="Calibri"/>
-              </a:rPr>
-              <a:t>AI
-assessment</a:t>
-            </a:r>
-          </a:p>
-        </p:txBody>
-      </p:sp>
-      <p:sp>
-        <p:nvSpPr>
-          <p:cNvPr id="8" name="Right Arrow 7"/>
+          </a:p>
+        </p:txBody>
+      </p:sp>
+      <p:sp>
+        <p:nvSpPr>
+          <p:cNvPr id="9" name="Rectangle 8"/>
           <p:cNvSpPr/>
           <p:nvPr/>
         </p:nvSpPr>
         <p:spPr>
           <a:xfrm>
-            <a:off x="3227832" y="2779776"/>
-            <a:ext cx="237744" cy="256032"/>
-          </a:xfrm>
-          <a:prstGeom prst="rightArrow">
+            <a:off x="2039112" y="2423160"/>
+            <a:ext cx="1298448" cy="960120"/>
+          </a:xfrm>
+          <a:prstGeom prst="rect">
             <a:avLst/>
           </a:prstGeom>
           <a:solidFill>
-            <a:srgbClr val="AFB8C4"/>
+            <a:srgbClr val="A20A29"/>
           </a:solidFill>
           <a:ln>
             <a:noFill/>
@@ -3782,20 +3869,56 @@
       </p:sp>
       <p:sp>
         <p:nvSpPr>
-          <p:cNvPr id="9" name="Rounded Rectangle 8"/>
+          <p:cNvPr id="10" name="TextBox 9"/>
+          <p:cNvSpPr txBox="1"/>
+          <p:nvPr/>
+        </p:nvSpPr>
+        <p:spPr>
+          <a:xfrm>
+            <a:off x="2039112" y="2423160"/>
+            <a:ext cx="1298448" cy="960120"/>
+          </a:xfrm>
+          <a:prstGeom prst="rect">
+            <a:avLst/>
+          </a:prstGeom>
+          <a:noFill/>
+        </p:spPr>
+        <p:txBody>
+          <a:bodyPr wrap="square" anchor="ctr" lIns="0" rIns="0" tIns="0" bIns="0">
+            <a:spAutoFit/>
+          </a:bodyPr>
+          <a:lstStyle/>
+          <a:p>
+            <a:pPr algn="ctr"/>
+            <a:r>
+              <a:rPr sz="1300" b="1">
+                <a:solidFill>
+                  <a:srgbClr val="FFFFFF"/>
+                </a:solidFill>
+                <a:latin typeface="Source Sans Pro"/>
+              </a:rPr>
+              <a:t>AI
+assessment</a:t>
+            </a:r>
+          </a:p>
+        </p:txBody>
+      </p:sp>
+      <p:sp>
+        <p:nvSpPr>
+          <p:cNvPr id="11" name="Right Arrow 10"/>
           <p:cNvSpPr/>
           <p:nvPr/>
         </p:nvSpPr>
         <p:spPr>
           <a:xfrm>
-            <a:off x="3429000" y="2423160"/>
-            <a:ext cx="1298448" cy="960120"/>
-          </a:xfrm>
-          <a:prstGeom prst="roundRect">
+            <a:off x="3337560" y="2779776"/>
+            <a:ext cx="237744" cy="256032"/>
+          </a:xfrm>
+          <a:prstGeom prst="rightArrow">
             <a:avLst/>
           </a:prstGeom>
           <a:solidFill>
-            <a:srgbClr val="2E74B5"/>
+            <a:srgbClr val="85847A"/>
           </a:solidFill>
           <a:ln>
             <a:noFill/>
@@ -3817,39 +3940,29 @@
           </a:fontRef>
         </p:style>
         <p:txBody>
-          <a:bodyPr rtlCol="0" anchor="ctr" wrap="square" lIns="45720" rIns="45720"/>
+          <a:bodyPr rtlCol="0" anchor="ctr"/>
           <a:lstStyle/>
           <a:p>
             <a:pPr algn="ctr"/>
-            <a:r>
-              <a:rPr sz="1300" b="1">
-                <a:solidFill>
-                  <a:srgbClr val="FFFFFF"/>
-                </a:solidFill>
-                <a:latin typeface="Calibri"/>
-              </a:rPr>
-              <a:t>AI design
-(diagrams)</a:t>
-            </a:r>
-          </a:p>
-        </p:txBody>
-      </p:sp>
-      <p:sp>
-        <p:nvSpPr>
-          <p:cNvPr id="10" name="Right Arrow 9"/>
+          </a:p>
+        </p:txBody>
+      </p:sp>
+      <p:sp>
+        <p:nvSpPr>
+          <p:cNvPr id="12" name="Rectangle 11"/>
           <p:cNvSpPr/>
           <p:nvPr/>
         </p:nvSpPr>
         <p:spPr>
           <a:xfrm>
-            <a:off x="4690872" y="2779776"/>
-            <a:ext cx="237744" cy="256032"/>
-          </a:xfrm>
-          <a:prstGeom prst="rightArrow">
+            <a:off x="3575304" y="2423160"/>
+            <a:ext cx="1298448" cy="960120"/>
+          </a:xfrm>
+          <a:prstGeom prst="rect">
             <a:avLst/>
           </a:prstGeom>
           <a:solidFill>
-            <a:srgbClr val="AFB8C4"/>
+            <a:srgbClr val="A20A29"/>
           </a:solidFill>
           <a:ln>
             <a:noFill/>
@@ -3880,20 +3993,56 @@
       </p:sp>
       <p:sp>
         <p:nvSpPr>
-          <p:cNvPr id="11" name="Rounded Rectangle 10"/>
+          <p:cNvPr id="13" name="TextBox 12"/>
+          <p:cNvSpPr txBox="1"/>
+          <p:nvPr/>
+        </p:nvSpPr>
+        <p:spPr>
+          <a:xfrm>
+            <a:off x="3575304" y="2423160"/>
+            <a:ext cx="1298448" cy="960120"/>
+          </a:xfrm>
+          <a:prstGeom prst="rect">
+            <a:avLst/>
+          </a:prstGeom>
+          <a:noFill/>
+        </p:spPr>
+        <p:txBody>
+          <a:bodyPr wrap="square" anchor="ctr" lIns="0" rIns="0" tIns="0" bIns="0">
+            <a:spAutoFit/>
+          </a:bodyPr>
+          <a:lstStyle/>
+          <a:p>
+            <a:pPr algn="ctr"/>
+            <a:r>
+              <a:rPr sz="1300" b="1">
+                <a:solidFill>
+                  <a:srgbClr val="FFFFFF"/>
+                </a:solidFill>
+                <a:latin typeface="Source Sans Pro"/>
+              </a:rPr>
+              <a:t>AI design
+(diagrams)</a:t>
+            </a:r>
+          </a:p>
+        </p:txBody>
+      </p:sp>
+      <p:sp>
+        <p:nvSpPr>
+          <p:cNvPr id="14" name="Right Arrow 13"/>
           <p:cNvSpPr/>
           <p:nvPr/>
         </p:nvSpPr>
         <p:spPr>
           <a:xfrm>
-            <a:off x="4892040" y="2423160"/>
-            <a:ext cx="1298448" cy="960120"/>
-          </a:xfrm>
-          <a:prstGeom prst="roundRect">
+            <a:off x="4873752" y="2779776"/>
+            <a:ext cx="237744" cy="256032"/>
+          </a:xfrm>
+          <a:prstGeom prst="rightArrow">
             <a:avLst/>
           </a:prstGeom>
           <a:solidFill>
-            <a:srgbClr val="BF8F00"/>
+            <a:srgbClr val="85847A"/>
           </a:solidFill>
           <a:ln>
             <a:noFill/>
@@ -3915,39 +4064,29 @@
           </a:fontRef>
         </p:style>
         <p:txBody>
-          <a:bodyPr rtlCol="0" anchor="ctr" wrap="square" lIns="45720" rIns="45720"/>
+          <a:bodyPr rtlCol="0" anchor="ctr"/>
           <a:lstStyle/>
           <a:p>
             <a:pPr algn="ctr"/>
-            <a:r>
-              <a:rPr sz="1300" b="1">
-                <a:solidFill>
-                  <a:srgbClr val="FFFFFF"/>
-                </a:solidFill>
-                <a:latin typeface="Calibri"/>
-              </a:rPr>
-              <a:t>HUMAN
-REVIEW</a:t>
-            </a:r>
-          </a:p>
-        </p:txBody>
-      </p:sp>
-      <p:sp>
-        <p:nvSpPr>
-          <p:cNvPr id="12" name="Right Arrow 11"/>
+          </a:p>
+        </p:txBody>
+      </p:sp>
+      <p:sp>
+        <p:nvSpPr>
+          <p:cNvPr id="15" name="Rectangle 14"/>
           <p:cNvSpPr/>
           <p:nvPr/>
         </p:nvSpPr>
         <p:spPr>
           <a:xfrm>
-            <a:off x="6153912" y="2779776"/>
-            <a:ext cx="237744" cy="256032"/>
-          </a:xfrm>
-          <a:prstGeom prst="rightArrow">
+            <a:off x="5111496" y="2423160"/>
+            <a:ext cx="1298448" cy="960120"/>
+          </a:xfrm>
+          <a:prstGeom prst="rect">
             <a:avLst/>
           </a:prstGeom>
           <a:solidFill>
-            <a:srgbClr val="AFB8C4"/>
+            <a:srgbClr val="B48825"/>
           </a:solidFill>
           <a:ln>
             <a:noFill/>
@@ -3978,20 +4117,56 @@
       </p:sp>
       <p:sp>
         <p:nvSpPr>
-          <p:cNvPr id="13" name="Rounded Rectangle 12"/>
+          <p:cNvPr id="16" name="TextBox 15"/>
+          <p:cNvSpPr txBox="1"/>
+          <p:nvPr/>
+        </p:nvSpPr>
+        <p:spPr>
+          <a:xfrm>
+            <a:off x="5111496" y="2423160"/>
+            <a:ext cx="1298448" cy="960120"/>
+          </a:xfrm>
+          <a:prstGeom prst="rect">
+            <a:avLst/>
+          </a:prstGeom>
+          <a:noFill/>
+        </p:spPr>
+        <p:txBody>
+          <a:bodyPr wrap="square" anchor="ctr" lIns="0" rIns="0" tIns="0" bIns="0">
+            <a:spAutoFit/>
+          </a:bodyPr>
+          <a:lstStyle/>
+          <a:p>
+            <a:pPr algn="ctr"/>
+            <a:r>
+              <a:rPr sz="1300" b="1">
+                <a:solidFill>
+                  <a:srgbClr val="FFFFFF"/>
+                </a:solidFill>
+                <a:latin typeface="Source Sans Pro"/>
+              </a:rPr>
+              <a:t>HUMAN
+REVIEW</a:t>
+            </a:r>
+          </a:p>
+        </p:txBody>
+      </p:sp>
+      <p:sp>
+        <p:nvSpPr>
+          <p:cNvPr id="17" name="Right Arrow 16"/>
           <p:cNvSpPr/>
           <p:nvPr/>
         </p:nvSpPr>
         <p:spPr>
           <a:xfrm>
-            <a:off x="6355079" y="2423160"/>
-            <a:ext cx="1298448" cy="960120"/>
-          </a:xfrm>
-          <a:prstGeom prst="roundRect">
+            <a:off x="6409944" y="2779776"/>
+            <a:ext cx="237744" cy="256032"/>
+          </a:xfrm>
+          <a:prstGeom prst="rightArrow">
             <a:avLst/>
           </a:prstGeom>
           <a:solidFill>
-            <a:srgbClr val="2E74B5"/>
+            <a:srgbClr val="85847A"/>
           </a:solidFill>
           <a:ln>
             <a:noFill/>
@@ -4013,39 +4188,29 @@
           </a:fontRef>
         </p:style>
         <p:txBody>
-          <a:bodyPr rtlCol="0" anchor="ctr" wrap="square" lIns="45720" rIns="45720"/>
+          <a:bodyPr rtlCol="0" anchor="ctr"/>
           <a:lstStyle/>
           <a:p>
             <a:pPr algn="ctr"/>
-            <a:r>
-              <a:rPr sz="1300" b="1">
-                <a:solidFill>
-                  <a:srgbClr val="FFFFFF"/>
-                </a:solidFill>
-                <a:latin typeface="Calibri"/>
-              </a:rPr>
-              <a:t>User
-stories</a:t>
-            </a:r>
-          </a:p>
-        </p:txBody>
-      </p:sp>
-      <p:sp>
-        <p:nvSpPr>
-          <p:cNvPr id="14" name="Right Arrow 13"/>
+          </a:p>
+        </p:txBody>
+      </p:sp>
+      <p:sp>
+        <p:nvSpPr>
+          <p:cNvPr id="18" name="Rectangle 17"/>
           <p:cNvSpPr/>
           <p:nvPr/>
         </p:nvSpPr>
         <p:spPr>
           <a:xfrm>
-            <a:off x="7616952" y="2779776"/>
-            <a:ext cx="237744" cy="256032"/>
-          </a:xfrm>
-          <a:prstGeom prst="rightArrow">
+            <a:off x="6647688" y="2423160"/>
+            <a:ext cx="1298448" cy="960120"/>
+          </a:xfrm>
+          <a:prstGeom prst="rect">
             <a:avLst/>
           </a:prstGeom>
           <a:solidFill>
-            <a:srgbClr val="AFB8C4"/>
+            <a:srgbClr val="A20A29"/>
           </a:solidFill>
           <a:ln>
             <a:noFill/>
@@ -4076,20 +4241,56 @@
       </p:sp>
       <p:sp>
         <p:nvSpPr>
-          <p:cNvPr id="15" name="Rounded Rectangle 14"/>
+          <p:cNvPr id="19" name="TextBox 18"/>
+          <p:cNvSpPr txBox="1"/>
+          <p:nvPr/>
+        </p:nvSpPr>
+        <p:spPr>
+          <a:xfrm>
+            <a:off x="6647688" y="2423160"/>
+            <a:ext cx="1298448" cy="960120"/>
+          </a:xfrm>
+          <a:prstGeom prst="rect">
+            <a:avLst/>
+          </a:prstGeom>
+          <a:noFill/>
+        </p:spPr>
+        <p:txBody>
+          <a:bodyPr wrap="square" anchor="ctr" lIns="0" rIns="0" tIns="0" bIns="0">
+            <a:spAutoFit/>
+          </a:bodyPr>
+          <a:lstStyle/>
+          <a:p>
+            <a:pPr algn="ctr"/>
+            <a:r>
+              <a:rPr sz="1300" b="1">
+                <a:solidFill>
+                  <a:srgbClr val="FFFFFF"/>
+                </a:solidFill>
+                <a:latin typeface="Source Sans Pro"/>
+              </a:rPr>
+              <a:t>User
+stories</a:t>
+            </a:r>
+          </a:p>
+        </p:txBody>
+      </p:sp>
+      <p:sp>
+        <p:nvSpPr>
+          <p:cNvPr id="20" name="Right Arrow 19"/>
           <p:cNvSpPr/>
           <p:nvPr/>
         </p:nvSpPr>
         <p:spPr>
           <a:xfrm>
-            <a:off x="7818119" y="2423160"/>
-            <a:ext cx="1298448" cy="960120"/>
-          </a:xfrm>
-          <a:prstGeom prst="roundRect">
+            <a:off x="7946136" y="2779776"/>
+            <a:ext cx="237744" cy="256032"/>
+          </a:xfrm>
+          <a:prstGeom prst="rightArrow">
             <a:avLst/>
           </a:prstGeom>
           <a:solidFill>
-            <a:srgbClr val="2E74B5"/>
+            <a:srgbClr val="85847A"/>
           </a:solidFill>
           <a:ln>
             <a:noFill/>
@@ -4111,39 +4312,29 @@
           </a:fontRef>
         </p:style>
         <p:txBody>
-          <a:bodyPr rtlCol="0" anchor="ctr" wrap="square" lIns="45720" rIns="45720"/>
+          <a:bodyPr rtlCol="0" anchor="ctr"/>
           <a:lstStyle/>
           <a:p>
             <a:pPr algn="ctr"/>
-            <a:r>
-              <a:rPr sz="1300" b="1">
-                <a:solidFill>
-                  <a:srgbClr val="FFFFFF"/>
-                </a:solidFill>
-                <a:latin typeface="Calibri"/>
-              </a:rPr>
-              <a:t>Build &amp;
-test</a:t>
-            </a:r>
-          </a:p>
-        </p:txBody>
-      </p:sp>
-      <p:sp>
-        <p:nvSpPr>
-          <p:cNvPr id="16" name="Right Arrow 15"/>
+          </a:p>
+        </p:txBody>
+      </p:sp>
+      <p:sp>
+        <p:nvSpPr>
+          <p:cNvPr id="21" name="Rectangle 20"/>
           <p:cNvSpPr/>
           <p:nvPr/>
         </p:nvSpPr>
         <p:spPr>
           <a:xfrm>
-            <a:off x="9079992" y="2779776"/>
-            <a:ext cx="237744" cy="256032"/>
-          </a:xfrm>
-          <a:prstGeom prst="rightArrow">
+            <a:off x="8183880" y="2423160"/>
+            <a:ext cx="1298448" cy="960120"/>
+          </a:xfrm>
+          <a:prstGeom prst="rect">
             <a:avLst/>
           </a:prstGeom>
           <a:solidFill>
-            <a:srgbClr val="AFB8C4"/>
+            <a:srgbClr val="A20A29"/>
           </a:solidFill>
           <a:ln>
             <a:noFill/>
@@ -4174,20 +4365,56 @@
       </p:sp>
       <p:sp>
         <p:nvSpPr>
-          <p:cNvPr id="17" name="Rounded Rectangle 16"/>
+          <p:cNvPr id="22" name="TextBox 21"/>
+          <p:cNvSpPr txBox="1"/>
+          <p:nvPr/>
+        </p:nvSpPr>
+        <p:spPr>
+          <a:xfrm>
+            <a:off x="8183880" y="2423160"/>
+            <a:ext cx="1298448" cy="960120"/>
+          </a:xfrm>
+          <a:prstGeom prst="rect">
+            <a:avLst/>
+          </a:prstGeom>
+          <a:noFill/>
+        </p:spPr>
+        <p:txBody>
+          <a:bodyPr wrap="square" anchor="ctr" lIns="0" rIns="0" tIns="0" bIns="0">
+            <a:spAutoFit/>
+          </a:bodyPr>
+          <a:lstStyle/>
+          <a:p>
+            <a:pPr algn="ctr"/>
+            <a:r>
+              <a:rPr sz="1300" b="1">
+                <a:solidFill>
+                  <a:srgbClr val="FFFFFF"/>
+                </a:solidFill>
+                <a:latin typeface="Source Sans Pro"/>
+              </a:rPr>
+              <a:t>Build &amp;
+test</a:t>
+            </a:r>
+          </a:p>
+        </p:txBody>
+      </p:sp>
+      <p:sp>
+        <p:nvSpPr>
+          <p:cNvPr id="23" name="Right Arrow 22"/>
           <p:cNvSpPr/>
           <p:nvPr/>
         </p:nvSpPr>
         <p:spPr>
           <a:xfrm>
-            <a:off x="9281159" y="2423160"/>
-            <a:ext cx="1298448" cy="960120"/>
-          </a:xfrm>
-          <a:prstGeom prst="roundRect">
+            <a:off x="9482328" y="2779776"/>
+            <a:ext cx="237744" cy="256032"/>
+          </a:xfrm>
+          <a:prstGeom prst="rightArrow">
             <a:avLst/>
           </a:prstGeom>
           <a:solidFill>
-            <a:srgbClr val="BF8F00"/>
+            <a:srgbClr val="85847A"/>
           </a:solidFill>
           <a:ln>
             <a:noFill/>
@@ -4209,39 +4436,29 @@
           </a:fontRef>
         </p:style>
         <p:txBody>
-          <a:bodyPr rtlCol="0" anchor="ctr" wrap="square" lIns="45720" rIns="45720"/>
+          <a:bodyPr rtlCol="0" anchor="ctr"/>
           <a:lstStyle/>
           <a:p>
             <a:pPr algn="ctr"/>
-            <a:r>
-              <a:rPr sz="1300" b="1">
-                <a:solidFill>
-                  <a:srgbClr val="FFFFFF"/>
-                </a:solidFill>
-                <a:latin typeface="Calibri"/>
-              </a:rPr>
-              <a:t>HUMAN
-APPROVAL</a:t>
-            </a:r>
-          </a:p>
-        </p:txBody>
-      </p:sp>
-      <p:sp>
-        <p:nvSpPr>
-          <p:cNvPr id="18" name="Right Arrow 17"/>
+          </a:p>
+        </p:txBody>
+      </p:sp>
+      <p:sp>
+        <p:nvSpPr>
+          <p:cNvPr id="24" name="Rectangle 23"/>
           <p:cNvSpPr/>
           <p:nvPr/>
         </p:nvSpPr>
         <p:spPr>
           <a:xfrm>
-            <a:off x="10543032" y="2779776"/>
-            <a:ext cx="237744" cy="256032"/>
-          </a:xfrm>
-          <a:prstGeom prst="rightArrow">
+            <a:off x="9720072" y="2423160"/>
+            <a:ext cx="1298448" cy="960120"/>
+          </a:xfrm>
+          <a:prstGeom prst="rect">
             <a:avLst/>
           </a:prstGeom>
           <a:solidFill>
-            <a:srgbClr val="AFB8C4"/>
+            <a:srgbClr val="B48825"/>
           </a:solidFill>
           <a:ln>
             <a:noFill/>
@@ -4272,20 +4489,56 @@
       </p:sp>
       <p:sp>
         <p:nvSpPr>
-          <p:cNvPr id="19" name="Rounded Rectangle 18"/>
+          <p:cNvPr id="25" name="TextBox 24"/>
+          <p:cNvSpPr txBox="1"/>
+          <p:nvPr/>
+        </p:nvSpPr>
+        <p:spPr>
+          <a:xfrm>
+            <a:off x="9720072" y="2423160"/>
+            <a:ext cx="1298448" cy="960120"/>
+          </a:xfrm>
+          <a:prstGeom prst="rect">
+            <a:avLst/>
+          </a:prstGeom>
+          <a:noFill/>
+        </p:spPr>
+        <p:txBody>
+          <a:bodyPr wrap="square" anchor="ctr" lIns="0" rIns="0" tIns="0" bIns="0">
+            <a:spAutoFit/>
+          </a:bodyPr>
+          <a:lstStyle/>
+          <a:p>
+            <a:pPr algn="ctr"/>
+            <a:r>
+              <a:rPr sz="1300" b="1">
+                <a:solidFill>
+                  <a:srgbClr val="FFFFFF"/>
+                </a:solidFill>
+                <a:latin typeface="Source Sans Pro"/>
+              </a:rPr>
+              <a:t>HUMAN
+APPROVAL</a:t>
+            </a:r>
+          </a:p>
+        </p:txBody>
+      </p:sp>
+      <p:sp>
+        <p:nvSpPr>
+          <p:cNvPr id="26" name="Right Arrow 25"/>
           <p:cNvSpPr/>
           <p:nvPr/>
         </p:nvSpPr>
         <p:spPr>
           <a:xfrm>
-            <a:off x="10744199" y="2423160"/>
-            <a:ext cx="1298448" cy="960120"/>
-          </a:xfrm>
-          <a:prstGeom prst="roundRect">
+            <a:off x="11018520" y="2779776"/>
+            <a:ext cx="237744" cy="256032"/>
+          </a:xfrm>
+          <a:prstGeom prst="rightArrow">
             <a:avLst/>
           </a:prstGeom>
           <a:solidFill>
-            <a:srgbClr val="2E7D32"/>
+            <a:srgbClr val="85847A"/>
           </a:solidFill>
           <a:ln>
             <a:noFill/>
@@ -4307,16 +4560,86 @@
           </a:fontRef>
         </p:style>
         <p:txBody>
-          <a:bodyPr rtlCol="0" anchor="ctr" wrap="square" lIns="45720" rIns="45720"/>
+          <a:bodyPr rtlCol="0" anchor="ctr"/>
           <a:lstStyle/>
           <a:p>
             <a:pPr algn="ctr"/>
+          </a:p>
+        </p:txBody>
+      </p:sp>
+      <p:sp>
+        <p:nvSpPr>
+          <p:cNvPr id="27" name="Rectangle 26"/>
+          <p:cNvSpPr/>
+          <p:nvPr/>
+        </p:nvSpPr>
+        <p:spPr>
+          <a:xfrm>
+            <a:off x="11256264" y="2423160"/>
+            <a:ext cx="1298448" cy="960120"/>
+          </a:xfrm>
+          <a:prstGeom prst="rect">
+            <a:avLst/>
+          </a:prstGeom>
+          <a:solidFill>
+            <a:srgbClr val="125C43"/>
+          </a:solidFill>
+          <a:ln>
+            <a:noFill/>
+          </a:ln>
+          <a:effectLst/>
+        </p:spPr>
+        <p:style>
+          <a:lnRef idx="1">
+            <a:schemeClr val="accent1"/>
+          </a:lnRef>
+          <a:fillRef idx="3">
+            <a:schemeClr val="accent1"/>
+          </a:fillRef>
+          <a:effectRef idx="2">
+            <a:schemeClr val="accent1"/>
+          </a:effectRef>
+          <a:fontRef idx="minor">
+            <a:schemeClr val="lt1"/>
+          </a:fontRef>
+        </p:style>
+        <p:txBody>
+          <a:bodyPr rtlCol="0" anchor="ctr"/>
+          <a:lstStyle/>
+          <a:p>
+            <a:pPr algn="ctr"/>
+          </a:p>
+        </p:txBody>
+      </p:sp>
+      <p:sp>
+        <p:nvSpPr>
+          <p:cNvPr id="28" name="TextBox 27"/>
+          <p:cNvSpPr txBox="1"/>
+          <p:nvPr/>
+        </p:nvSpPr>
+        <p:spPr>
+          <a:xfrm>
+            <a:off x="11256264" y="2423160"/>
+            <a:ext cx="1298448" cy="960120"/>
+          </a:xfrm>
+          <a:prstGeom prst="rect">
+            <a:avLst/>
+          </a:prstGeom>
+          <a:noFill/>
+        </p:spPr>
+        <p:txBody>
+          <a:bodyPr wrap="square" anchor="ctr" lIns="0" rIns="0" tIns="0" bIns="0">
+            <a:spAutoFit/>
+          </a:bodyPr>
+          <a:lstStyle/>
+          <a:p>
+            <a:pPr algn="ctr"/>
             <a:r>
               <a:rPr sz="1300" b="1">
                 <a:solidFill>
                   <a:srgbClr val="FFFFFF"/>
                 </a:solidFill>
-                <a:latin typeface="Calibri"/>
+                <a:latin typeface="Source Sans Pro"/>
               </a:rPr>
               <a:t>Release</a:t>
             </a:r>
@@ -4325,7 +4648,7 @@
       </p:sp>
       <p:sp>
         <p:nvSpPr>
-          <p:cNvPr id="20" name="TextBox 19"/>
+          <p:cNvPr id="29" name="TextBox 28"/>
           <p:cNvSpPr txBox="1"/>
           <p:nvPr/>
         </p:nvSpPr>
@@ -4340,54 +4663,42 @@
           <a:noFill/>
         </p:spPr>
         <p:txBody>
-          <a:bodyPr wrap="square">
+          <a:bodyPr wrap="square" anchor="t" lIns="0" rIns="0" tIns="0" bIns="0">
             <a:spAutoFit/>
           </a:bodyPr>
           <a:lstStyle/>
           <a:p>
-            <a:pPr algn="l" marL="256032" indent="-256032">
-              <a:spcAft>
-                <a:spcPts val="1200"/>
-              </a:spcAft>
-            </a:pPr>
+            <a:pPr algn="l"/>
             <a:r>
               <a:rPr sz="1900" b="0">
                 <a:solidFill>
-                  <a:srgbClr val="595959"/>
-                </a:solidFill>
-                <a:latin typeface="Calibri"/>
+                  <a:srgbClr val="525146"/>
+                </a:solidFill>
+                <a:latin typeface="Source Sans Pro"/>
               </a:rPr>
               <a:t>•  AI prepares every deliverable: assessment, design diagrams, stories, code, tests, docs.</a:t>
             </a:r>
           </a:p>
           <a:p>
-            <a:pPr algn="l" marL="256032" indent="-256032">
-              <a:spcAft>
-                <a:spcPts val="1200"/>
-              </a:spcAft>
-            </a:pPr>
+            <a:pPr algn="l"/>
             <a:r>
               <a:rPr sz="1900" b="0">
                 <a:solidFill>
-                  <a:srgbClr val="595959"/>
-                </a:solidFill>
-                <a:latin typeface="Calibri"/>
+                  <a:srgbClr val="525146"/>
+                </a:solidFill>
+                <a:latin typeface="Source Sans Pro"/>
               </a:rPr>
-              <a:t>•  The amber boxes are decision points — a person reviews and approves before work continues.</a:t>
-            </a:r>
-          </a:p>
-          <a:p>
-            <a:pPr algn="l" marL="256032" indent="-256032">
-              <a:spcAft>
-                <a:spcPts val="1200"/>
-              </a:spcAft>
-            </a:pPr>
+              <a:t>•  The gold boxes are decision points — a person reviews and approves before work continues.</a:t>
+            </a:r>
+          </a:p>
+          <a:p>
+            <a:pPr algn="l"/>
             <a:r>
               <a:rPr sz="1900" b="0">
                 <a:solidFill>
-                  <a:srgbClr val="595959"/>
-                </a:solidFill>
-                <a:latin typeface="Calibri"/>
+                  <a:srgbClr val="525146"/>
+                </a:solidFill>
+                <a:latin typeface="Source Sans Pro"/>
               </a:rPr>
               <a:t>•  If the reviewer rejects, the pipeline stops. That is by design, not a limitation.</a:t>
             </a:r>
@@ -4414,59 +4725,20 @@
       <p:grpSpPr/>
       <p:sp>
         <p:nvSpPr>
-          <p:cNvPr id="2" name="TextBox 1"/>
-          <p:cNvSpPr txBox="1"/>
-          <p:nvPr/>
-        </p:nvSpPr>
-        <p:spPr>
-          <a:xfrm>
-            <a:off x="548640" y="320040"/>
-            <a:ext cx="11064240" cy="685800"/>
-          </a:xfrm>
-          <a:prstGeom prst="rect">
-            <a:avLst/>
-          </a:prstGeom>
-          <a:noFill/>
-        </p:spPr>
-        <p:txBody>
-          <a:bodyPr wrap="square">
-            <a:spAutoFit/>
-          </a:bodyPr>
-          <a:lstStyle/>
-          <a:p>
-            <a:pPr algn="l">
-              <a:spcAft>
-                <a:spcPts val="800"/>
-              </a:spcAft>
-            </a:pPr>
-            <a:r>
-              <a:rPr sz="3400" b="1">
-                <a:solidFill>
-                  <a:srgbClr val="1F3864"/>
-                </a:solidFill>
-                <a:latin typeface="Calibri"/>
-              </a:rPr>
-              <a:t>Nothing advances without passing a gate</a:t>
-            </a:r>
-          </a:p>
-        </p:txBody>
-      </p:sp>
-      <p:sp>
-        <p:nvSpPr>
-          <p:cNvPr id="3" name="Rectangle 2"/>
+          <p:cNvPr id="2" name="Rectangle 1"/>
           <p:cNvSpPr/>
           <p:nvPr/>
         </p:nvSpPr>
         <p:spPr>
           <a:xfrm>
-            <a:off x="594360" y="987552"/>
-            <a:ext cx="2011680" cy="38100"/>
+            <a:off x="0" y="0"/>
+            <a:ext cx="12191695" cy="6858000"/>
           </a:xfrm>
           <a:prstGeom prst="rect">
             <a:avLst/>
           </a:prstGeom>
           <a:solidFill>
-            <a:srgbClr val="2E74B5"/>
+            <a:srgbClr val="F0F0EC"/>
           </a:solidFill>
           <a:ln>
             <a:noFill/>
@@ -4497,14 +4769,14 @@
       </p:sp>
       <p:sp>
         <p:nvSpPr>
-          <p:cNvPr id="4" name="TextBox 3"/>
+          <p:cNvPr id="3" name="TextBox 2"/>
           <p:cNvSpPr txBox="1"/>
           <p:nvPr/>
         </p:nvSpPr>
         <p:spPr>
           <a:xfrm>
-            <a:off x="548640" y="1115568"/>
-            <a:ext cx="11064240" cy="457200"/>
+            <a:off x="548640" y="320040"/>
+            <a:ext cx="11064240" cy="685800"/>
           </a:xfrm>
           <a:prstGeom prst="rect">
             <a:avLst/>
@@ -4512,44 +4784,40 @@
           <a:noFill/>
         </p:spPr>
         <p:txBody>
-          <a:bodyPr wrap="square">
+          <a:bodyPr wrap="square" anchor="t" lIns="0" rIns="0" tIns="0" bIns="0">
             <a:spAutoFit/>
           </a:bodyPr>
           <a:lstStyle/>
           <a:p>
-            <a:pPr algn="l">
-              <a:spcAft>
-                <a:spcPts val="800"/>
-              </a:spcAft>
-            </a:pPr>
-            <a:r>
-              <a:rPr sz="1600" b="0">
-                <a:solidFill>
-                  <a:srgbClr val="595959"/>
-                </a:solidFill>
-                <a:latin typeface="Calibri"/>
+            <a:pPr algn="l"/>
+            <a:r>
+              <a:rPr sz="3400" b="1">
+                <a:solidFill>
+                  <a:srgbClr val="36362F"/>
+                </a:solidFill>
+                <a:latin typeface="Source Sans Pro"/>
               </a:rPr>
-              <a:t>Five checkpoints from intake to release</a:t>
-            </a:r>
-          </a:p>
-        </p:txBody>
-      </p:sp>
-      <p:sp>
-        <p:nvSpPr>
-          <p:cNvPr id="5" name="Rounded Rectangle 4"/>
+              <a:t>Nothing advances without passing a gate</a:t>
+            </a:r>
+          </a:p>
+        </p:txBody>
+      </p:sp>
+      <p:sp>
+        <p:nvSpPr>
+          <p:cNvPr id="4" name="Rectangle 3"/>
           <p:cNvSpPr/>
           <p:nvPr/>
         </p:nvSpPr>
         <p:spPr>
           <a:xfrm>
-            <a:off x="731520" y="1920240"/>
-            <a:ext cx="2103120" cy="1005840"/>
-          </a:xfrm>
-          <a:prstGeom prst="roundRect">
+            <a:off x="594360" y="987552"/>
+            <a:ext cx="732536" cy="38100"/>
+          </a:xfrm>
+          <a:prstGeom prst="rect">
             <a:avLst/>
           </a:prstGeom>
           <a:solidFill>
-            <a:srgbClr val="1F3864"/>
+            <a:srgbClr val="A20A29"/>
           </a:solidFill>
           <a:ln>
             <a:noFill/>
@@ -4571,32 +4839,23 @@
           </a:fontRef>
         </p:style>
         <p:txBody>
-          <a:bodyPr rtlCol="0" anchor="ctr" wrap="square" lIns="45720" rIns="45720"/>
+          <a:bodyPr rtlCol="0" anchor="ctr"/>
           <a:lstStyle/>
           <a:p>
             <a:pPr algn="ctr"/>
-            <a:r>
-              <a:rPr sz="1800" b="1">
-                <a:solidFill>
-                  <a:srgbClr val="FFFFFF"/>
-                </a:solidFill>
-                <a:latin typeface="Calibri"/>
-              </a:rPr>
-              <a:t>Gates 0–2</a:t>
-            </a:r>
-          </a:p>
-        </p:txBody>
-      </p:sp>
-      <p:sp>
-        <p:nvSpPr>
-          <p:cNvPr id="6" name="TextBox 5"/>
+          </a:p>
+        </p:txBody>
+      </p:sp>
+      <p:sp>
+        <p:nvSpPr>
+          <p:cNvPr id="5" name="TextBox 4"/>
           <p:cNvSpPr txBox="1"/>
           <p:nvPr/>
         </p:nvSpPr>
         <p:spPr>
           <a:xfrm>
-            <a:off x="3200400" y="1901952"/>
-            <a:ext cx="8321040" cy="1143000"/>
+            <a:off x="548640" y="1115568"/>
+            <a:ext cx="11064240" cy="457200"/>
           </a:xfrm>
           <a:prstGeom prst="rect">
             <a:avLst/>
@@ -4604,60 +4863,40 @@
           <a:noFill/>
         </p:spPr>
         <p:txBody>
-          <a:bodyPr wrap="square">
+          <a:bodyPr wrap="square" anchor="t" lIns="0" rIns="0" tIns="0" bIns="0">
             <a:spAutoFit/>
           </a:bodyPr>
           <a:lstStyle/>
           <a:p>
-            <a:pPr algn="l">
-              <a:spcAft>
-                <a:spcPts val="300"/>
-              </a:spcAft>
-            </a:pPr>
-            <a:r>
-              <a:rPr sz="2000" b="1">
-                <a:solidFill>
-                  <a:srgbClr val="2E74B5"/>
-                </a:solidFill>
-                <a:latin typeface="Calibri"/>
+            <a:pPr algn="l"/>
+            <a:r>
+              <a:rPr sz="1600" b="0">
+                <a:solidFill>
+                  <a:srgbClr val="525146"/>
+                </a:solidFill>
+                <a:latin typeface="Source Sans Pro"/>
               </a:rPr>
-              <a:t>Completeness checks</a:t>
-            </a:r>
-          </a:p>
-          <a:p>
-            <a:pPr algn="l">
-              <a:spcAft>
-                <a:spcPts val="800"/>
-              </a:spcAft>
-            </a:pPr>
-            <a:r>
-              <a:rPr sz="1600" b="0">
-                <a:solidFill>
-                  <a:srgbClr val="595959"/>
-                </a:solidFill>
-                <a:latin typeface="Calibri"/>
-              </a:rPr>
-              <a:t>Is every requirement mapped to a story? Is every story testable? Automated checks — before any human spends time reviewing.</a:t>
-            </a:r>
-          </a:p>
-        </p:txBody>
-      </p:sp>
-      <p:sp>
-        <p:nvSpPr>
-          <p:cNvPr id="7" name="Rounded Rectangle 6"/>
+              <a:t>Five checkpoints from intake to release</a:t>
+            </a:r>
+          </a:p>
+        </p:txBody>
+      </p:sp>
+      <p:sp>
+        <p:nvSpPr>
+          <p:cNvPr id="6" name="Rectangle 5"/>
           <p:cNvSpPr/>
           <p:nvPr/>
         </p:nvSpPr>
         <p:spPr>
           <a:xfrm>
-            <a:off x="731520" y="3291840"/>
+            <a:off x="731520" y="1920240"/>
             <a:ext cx="2103120" cy="1005840"/>
           </a:xfrm>
-          <a:prstGeom prst="roundRect">
+          <a:prstGeom prst="rect">
             <a:avLst/>
           </a:prstGeom>
           <a:solidFill>
-            <a:srgbClr val="1F3864"/>
+            <a:srgbClr val="A20A29"/>
           </a:solidFill>
           <a:ln>
             <a:noFill/>
@@ -4679,18 +4918,44 @@
           </a:fontRef>
         </p:style>
         <p:txBody>
-          <a:bodyPr rtlCol="0" anchor="ctr" wrap="square" lIns="45720" rIns="45720"/>
+          <a:bodyPr rtlCol="0" anchor="ctr"/>
           <a:lstStyle/>
           <a:p>
             <a:pPr algn="ctr"/>
+          </a:p>
+        </p:txBody>
+      </p:sp>
+      <p:sp>
+        <p:nvSpPr>
+          <p:cNvPr id="7" name="TextBox 6"/>
+          <p:cNvSpPr txBox="1"/>
+          <p:nvPr/>
+        </p:nvSpPr>
+        <p:spPr>
+          <a:xfrm>
+            <a:off x="731520" y="1920240"/>
+            <a:ext cx="2103120" cy="1005840"/>
+          </a:xfrm>
+          <a:prstGeom prst="rect">
+            <a:avLst/>
+          </a:prstGeom>
+          <a:noFill/>
+        </p:spPr>
+        <p:txBody>
+          <a:bodyPr wrap="square" anchor="ctr" lIns="0" rIns="0" tIns="0" bIns="0">
+            <a:spAutoFit/>
+          </a:bodyPr>
+          <a:lstStyle/>
+          <a:p>
+            <a:pPr algn="ctr"/>
             <a:r>
               <a:rPr sz="1800" b="1">
                 <a:solidFill>
                   <a:srgbClr val="FFFFFF"/>
                 </a:solidFill>
-                <a:latin typeface="Calibri"/>
+                <a:latin typeface="Source Sans Pro"/>
               </a:rPr>
-              <a:t>Gate 3</a:t>
+              <a:t>Gates 0–2</a:t>
             </a:r>
           </a:p>
         </p:txBody>
@@ -4703,7 +4968,7 @@
         </p:nvSpPr>
         <p:spPr>
           <a:xfrm>
-            <a:off x="3200400" y="3273552"/>
+            <a:off x="3200400" y="1901952"/>
             <a:ext cx="8321040" cy="1143000"/>
           </a:xfrm>
           <a:prstGeom prst="rect">
@@ -4712,60 +4977,52 @@
           <a:noFill/>
         </p:spPr>
         <p:txBody>
-          <a:bodyPr wrap="square">
+          <a:bodyPr wrap="square" anchor="t" lIns="0" rIns="0" tIns="0" bIns="0">
             <a:spAutoFit/>
           </a:bodyPr>
           <a:lstStyle/>
           <a:p>
-            <a:pPr algn="l">
-              <a:spcAft>
-                <a:spcPts val="300"/>
-              </a:spcAft>
-            </a:pPr>
+            <a:pPr algn="l"/>
             <a:r>
               <a:rPr sz="2000" b="1">
                 <a:solidFill>
-                  <a:srgbClr val="2E74B5"/>
-                </a:solidFill>
-                <a:latin typeface="Calibri"/>
+                  <a:srgbClr val="7A0820"/>
+                </a:solidFill>
+                <a:latin typeface="Source Sans Pro"/>
               </a:rPr>
-              <a:t>Independent review</a:t>
-            </a:r>
-          </a:p>
-          <a:p>
-            <a:pPr algn="l">
-              <a:spcAft>
-                <a:spcPts val="800"/>
-              </a:spcAft>
-            </a:pPr>
+              <a:t>Completeness checks</a:t>
+            </a:r>
+          </a:p>
+          <a:p>
+            <a:pPr algn="l"/>
             <a:r>
               <a:rPr sz="1600" b="0">
                 <a:solidFill>
-                  <a:srgbClr val="595959"/>
-                </a:solidFill>
-                <a:latin typeface="Calibri"/>
+                  <a:srgbClr val="525146"/>
+                </a:solidFill>
+                <a:latin typeface="Source Sans Pro"/>
               </a:rPr>
-              <a:t>A second, separate AI reviews the first one's work against the design. Critical gaps block progress. No phase approves its own work.</a:t>
-            </a:r>
-          </a:p>
-        </p:txBody>
-      </p:sp>
-      <p:sp>
-        <p:nvSpPr>
-          <p:cNvPr id="9" name="Rounded Rectangle 8"/>
+              <a:t>Is every requirement mapped to a story? Is every story testable? Automated checks — before any human spends time reviewing.</a:t>
+            </a:r>
+          </a:p>
+        </p:txBody>
+      </p:sp>
+      <p:sp>
+        <p:nvSpPr>
+          <p:cNvPr id="9" name="Rectangle 8"/>
           <p:cNvSpPr/>
           <p:nvPr/>
         </p:nvSpPr>
         <p:spPr>
           <a:xfrm>
-            <a:off x="731520" y="4663440"/>
+            <a:off x="731520" y="3291840"/>
             <a:ext cx="2103120" cy="1005840"/>
           </a:xfrm>
-          <a:prstGeom prst="roundRect">
+          <a:prstGeom prst="rect">
             <a:avLst/>
           </a:prstGeom>
           <a:solidFill>
-            <a:srgbClr val="1F3864"/>
+            <a:srgbClr val="A20A29"/>
           </a:solidFill>
           <a:ln>
             <a:noFill/>
@@ -4787,19 +5044,10 @@
           </a:fontRef>
         </p:style>
         <p:txBody>
-          <a:bodyPr rtlCol="0" anchor="ctr" wrap="square" lIns="45720" rIns="45720"/>
+          <a:bodyPr rtlCol="0" anchor="ctr"/>
           <a:lstStyle/>
           <a:p>
             <a:pPr algn="ctr"/>
-            <a:r>
-              <a:rPr sz="1800" b="1">
-                <a:solidFill>
-                  <a:srgbClr val="FFFFFF"/>
-                </a:solidFill>
-                <a:latin typeface="Calibri"/>
-              </a:rPr>
-              <a:t>Gate 4</a:t>
-            </a:r>
           </a:p>
         </p:txBody>
       </p:sp>
@@ -4811,8 +5059,8 @@
         </p:nvSpPr>
         <p:spPr>
           <a:xfrm>
-            <a:off x="3200400" y="4645152"/>
-            <a:ext cx="8321040" cy="1143000"/>
+            <a:off x="731520" y="3291840"/>
+            <a:ext cx="2103120" cy="1005840"/>
           </a:xfrm>
           <a:prstGeom prst="rect">
             <a:avLst/>
@@ -4820,65 +5068,90 @@
           <a:noFill/>
         </p:spPr>
         <p:txBody>
-          <a:bodyPr wrap="square">
+          <a:bodyPr wrap="square" anchor="ctr" lIns="0" rIns="0" tIns="0" bIns="0">
             <a:spAutoFit/>
           </a:bodyPr>
           <a:lstStyle/>
           <a:p>
-            <a:pPr algn="l">
-              <a:spcAft>
-                <a:spcPts val="300"/>
-              </a:spcAft>
-            </a:pPr>
+            <a:pPr algn="ctr"/>
+            <a:r>
+              <a:rPr sz="1800" b="1">
+                <a:solidFill>
+                  <a:srgbClr val="FFFFFF"/>
+                </a:solidFill>
+                <a:latin typeface="Source Sans Pro"/>
+              </a:rPr>
+              <a:t>Gate 3</a:t>
+            </a:r>
+          </a:p>
+        </p:txBody>
+      </p:sp>
+      <p:sp>
+        <p:nvSpPr>
+          <p:cNvPr id="11" name="TextBox 10"/>
+          <p:cNvSpPr txBox="1"/>
+          <p:nvPr/>
+        </p:nvSpPr>
+        <p:spPr>
+          <a:xfrm>
+            <a:off x="3200400" y="3273552"/>
+            <a:ext cx="8321040" cy="1143000"/>
+          </a:xfrm>
+          <a:prstGeom prst="rect">
+            <a:avLst/>
+          </a:prstGeom>
+          <a:noFill/>
+        </p:spPr>
+        <p:txBody>
+          <a:bodyPr wrap="square" anchor="t" lIns="0" rIns="0" tIns="0" bIns="0">
+            <a:spAutoFit/>
+          </a:bodyPr>
+          <a:lstStyle/>
+          <a:p>
+            <a:pPr algn="l"/>
             <a:r>
               <a:rPr sz="2000" b="1">
                 <a:solidFill>
-                  <a:srgbClr val="2E74B5"/>
-                </a:solidFill>
-                <a:latin typeface="Calibri"/>
+                  <a:srgbClr val="7A0820"/>
+                </a:solidFill>
+                <a:latin typeface="Source Sans Pro"/>
               </a:rPr>
-              <a:t>Human approval</a:t>
-            </a:r>
-          </a:p>
-          <a:p>
-            <a:pPr algn="l">
-              <a:spcAft>
-                <a:spcPts val="800"/>
-              </a:spcAft>
-            </a:pPr>
+              <a:t>Independent review</a:t>
+            </a:r>
+          </a:p>
+          <a:p>
+            <a:pPr algn="l"/>
             <a:r>
               <a:rPr sz="1600" b="0">
                 <a:solidFill>
-                  <a:srgbClr val="595959"/>
-                </a:solidFill>
-                <a:latin typeface="Calibri"/>
+                  <a:srgbClr val="525146"/>
+                </a:solidFill>
+                <a:latin typeface="Source Sans Pro"/>
               </a:rPr>
-              <a:t>A person makes the final call before release. The system cannot ship on its own.</a:t>
-            </a:r>
-          </a:p>
-        </p:txBody>
-      </p:sp>
-      <p:sp>
-        <p:nvSpPr>
-          <p:cNvPr id="11" name="Rounded Rectangle 10"/>
+              <a:t>A second, separate AI reviews the first one's work against the design. Critical gaps block progress. No phase approves its own work.</a:t>
+            </a:r>
+          </a:p>
+        </p:txBody>
+      </p:sp>
+      <p:sp>
+        <p:nvSpPr>
+          <p:cNvPr id="12" name="Rectangle 11"/>
           <p:cNvSpPr/>
           <p:nvPr/>
         </p:nvSpPr>
         <p:spPr>
           <a:xfrm>
-            <a:off x="731520" y="5989320"/>
-            <a:ext cx="10789920" cy="502920"/>
-          </a:xfrm>
-          <a:prstGeom prst="roundRect">
+            <a:off x="731520" y="4663440"/>
+            <a:ext cx="2103120" cy="1005840"/>
+          </a:xfrm>
+          <a:prstGeom prst="rect">
             <a:avLst/>
           </a:prstGeom>
           <a:solidFill>
-            <a:srgbClr val="F2F5FA"/>
+            <a:srgbClr val="A20A29"/>
           </a:solidFill>
           <a:ln>
-            <a:solidFill>
-              <a:srgbClr val="D5DEEA"/>
-            </a:solidFill>
+            <a:noFill/>
           </a:ln>
           <a:effectLst/>
         </p:spPr>
@@ -4897,16 +5170,170 @@
           </a:fontRef>
         </p:style>
         <p:txBody>
-          <a:bodyPr rtlCol="0" anchor="ctr" wrap="square"/>
+          <a:bodyPr rtlCol="0" anchor="ctr"/>
           <a:lstStyle/>
           <a:p>
             <a:pPr algn="ctr"/>
+          </a:p>
+        </p:txBody>
+      </p:sp>
+      <p:sp>
+        <p:nvSpPr>
+          <p:cNvPr id="13" name="TextBox 12"/>
+          <p:cNvSpPr txBox="1"/>
+          <p:nvPr/>
+        </p:nvSpPr>
+        <p:spPr>
+          <a:xfrm>
+            <a:off x="731520" y="4663440"/>
+            <a:ext cx="2103120" cy="1005840"/>
+          </a:xfrm>
+          <a:prstGeom prst="rect">
+            <a:avLst/>
+          </a:prstGeom>
+          <a:noFill/>
+        </p:spPr>
+        <p:txBody>
+          <a:bodyPr wrap="square" anchor="ctr" lIns="0" rIns="0" tIns="0" bIns="0">
+            <a:spAutoFit/>
+          </a:bodyPr>
+          <a:lstStyle/>
+          <a:p>
+            <a:pPr algn="ctr"/>
+            <a:r>
+              <a:rPr sz="1800" b="1">
+                <a:solidFill>
+                  <a:srgbClr val="FFFFFF"/>
+                </a:solidFill>
+                <a:latin typeface="Source Sans Pro"/>
+              </a:rPr>
+              <a:t>Gate 4</a:t>
+            </a:r>
+          </a:p>
+        </p:txBody>
+      </p:sp>
+      <p:sp>
+        <p:nvSpPr>
+          <p:cNvPr id="14" name="TextBox 13"/>
+          <p:cNvSpPr txBox="1"/>
+          <p:nvPr/>
+        </p:nvSpPr>
+        <p:spPr>
+          <a:xfrm>
+            <a:off x="3200400" y="4645152"/>
+            <a:ext cx="8321040" cy="1143000"/>
+          </a:xfrm>
+          <a:prstGeom prst="rect">
+            <a:avLst/>
+          </a:prstGeom>
+          <a:noFill/>
+        </p:spPr>
+        <p:txBody>
+          <a:bodyPr wrap="square" anchor="t" lIns="0" rIns="0" tIns="0" bIns="0">
+            <a:spAutoFit/>
+          </a:bodyPr>
+          <a:lstStyle/>
+          <a:p>
+            <a:pPr algn="l"/>
+            <a:r>
+              <a:rPr sz="2000" b="1">
+                <a:solidFill>
+                  <a:srgbClr val="7A0820"/>
+                </a:solidFill>
+                <a:latin typeface="Source Sans Pro"/>
+              </a:rPr>
+              <a:t>Human approval</a:t>
+            </a:r>
+          </a:p>
+          <a:p>
+            <a:pPr algn="l"/>
+            <a:r>
+              <a:rPr sz="1600" b="0">
+                <a:solidFill>
+                  <a:srgbClr val="525146"/>
+                </a:solidFill>
+                <a:latin typeface="Source Sans Pro"/>
+              </a:rPr>
+              <a:t>A person makes the final call before release. The system cannot ship on its own.</a:t>
+            </a:r>
+          </a:p>
+        </p:txBody>
+      </p:sp>
+      <p:sp>
+        <p:nvSpPr>
+          <p:cNvPr id="15" name="Rectangle 14"/>
+          <p:cNvSpPr/>
+          <p:nvPr/>
+        </p:nvSpPr>
+        <p:spPr>
+          <a:xfrm>
+            <a:off x="731520" y="5989320"/>
+            <a:ext cx="10789920" cy="502920"/>
+          </a:xfrm>
+          <a:prstGeom prst="rect">
+            <a:avLst/>
+          </a:prstGeom>
+          <a:solidFill>
+            <a:srgbClr val="F7E9EC"/>
+          </a:solidFill>
+          <a:ln w="12700">
+            <a:solidFill>
+              <a:srgbClr val="A20A29"/>
+            </a:solidFill>
+          </a:ln>
+          <a:effectLst/>
+        </p:spPr>
+        <p:style>
+          <a:lnRef idx="1">
+            <a:schemeClr val="accent1"/>
+          </a:lnRef>
+          <a:fillRef idx="3">
+            <a:schemeClr val="accent1"/>
+          </a:fillRef>
+          <a:effectRef idx="2">
+            <a:schemeClr val="accent1"/>
+          </a:effectRef>
+          <a:fontRef idx="minor">
+            <a:schemeClr val="lt1"/>
+          </a:fontRef>
+        </p:style>
+        <p:txBody>
+          <a:bodyPr rtlCol="0" anchor="ctr"/>
+          <a:lstStyle/>
+          <a:p>
+            <a:pPr algn="ctr"/>
+          </a:p>
+        </p:txBody>
+      </p:sp>
+      <p:sp>
+        <p:nvSpPr>
+          <p:cNvPr id="16" name="TextBox 15"/>
+          <p:cNvSpPr txBox="1"/>
+          <p:nvPr/>
+        </p:nvSpPr>
+        <p:spPr>
+          <a:xfrm>
+            <a:off x="731520" y="5989320"/>
+            <a:ext cx="10789920" cy="502920"/>
+          </a:xfrm>
+          <a:prstGeom prst="rect">
+            <a:avLst/>
+          </a:prstGeom>
+          <a:noFill/>
+        </p:spPr>
+        <p:txBody>
+          <a:bodyPr wrap="square" anchor="ctr" lIns="0" rIns="0" tIns="0" bIns="0">
+            <a:spAutoFit/>
+          </a:bodyPr>
+          <a:lstStyle/>
+          <a:p>
+            <a:pPr algn="ctr"/>
             <a:r>
               <a:rPr sz="1600" b="1">
                 <a:solidFill>
-                  <a:srgbClr val="1F3864"/>
-                </a:solidFill>
-                <a:latin typeface="Calibri"/>
+                  <a:srgbClr val="7A0820"/>
+                </a:solidFill>
+                <a:latin typeface="Source Sans Pro"/>
               </a:rPr>
               <a:t>The gates are real: a rejection stops the pipeline. We will demonstrate that live.</a:t>
             </a:r>
@@ -4933,59 +5360,20 @@
       <p:grpSpPr/>
       <p:sp>
         <p:nvSpPr>
-          <p:cNvPr id="2" name="TextBox 1"/>
-          <p:cNvSpPr txBox="1"/>
-          <p:nvPr/>
-        </p:nvSpPr>
-        <p:spPr>
-          <a:xfrm>
-            <a:off x="548640" y="320040"/>
-            <a:ext cx="11064240" cy="685800"/>
-          </a:xfrm>
-          <a:prstGeom prst="rect">
-            <a:avLst/>
-          </a:prstGeom>
-          <a:noFill/>
-        </p:spPr>
-        <p:txBody>
-          <a:bodyPr wrap="square">
-            <a:spAutoFit/>
-          </a:bodyPr>
-          <a:lstStyle/>
-          <a:p>
-            <a:pPr algn="l">
-              <a:spcAft>
-                <a:spcPts val="800"/>
-              </a:spcAft>
-            </a:pPr>
-            <a:r>
-              <a:rPr sz="3400" b="1">
-                <a:solidFill>
-                  <a:srgbClr val="1F3864"/>
-                </a:solidFill>
-                <a:latin typeface="Calibri"/>
-              </a:rPr>
-              <a:t>Every output can be traced back</a:t>
-            </a:r>
-          </a:p>
-        </p:txBody>
-      </p:sp>
-      <p:sp>
-        <p:nvSpPr>
-          <p:cNvPr id="3" name="Rectangle 2"/>
+          <p:cNvPr id="2" name="Rectangle 1"/>
           <p:cNvSpPr/>
           <p:nvPr/>
         </p:nvSpPr>
         <p:spPr>
           <a:xfrm>
-            <a:off x="594360" y="987552"/>
-            <a:ext cx="2011680" cy="38100"/>
+            <a:off x="0" y="0"/>
+            <a:ext cx="12191695" cy="6858000"/>
           </a:xfrm>
           <a:prstGeom prst="rect">
             <a:avLst/>
           </a:prstGeom>
           <a:solidFill>
-            <a:srgbClr val="2E74B5"/>
+            <a:srgbClr val="F0F0EC"/>
           </a:solidFill>
           <a:ln>
             <a:noFill/>
@@ -5016,14 +5404,14 @@
       </p:sp>
       <p:sp>
         <p:nvSpPr>
-          <p:cNvPr id="4" name="TextBox 3"/>
+          <p:cNvPr id="3" name="TextBox 2"/>
           <p:cNvSpPr txBox="1"/>
           <p:nvPr/>
         </p:nvSpPr>
         <p:spPr>
           <a:xfrm>
-            <a:off x="548640" y="1115568"/>
-            <a:ext cx="11064240" cy="457200"/>
+            <a:off x="548640" y="320040"/>
+            <a:ext cx="11064240" cy="685800"/>
           </a:xfrm>
           <a:prstGeom prst="rect">
             <a:avLst/>
@@ -5031,49 +5419,43 @@
           <a:noFill/>
         </p:spPr>
         <p:txBody>
-          <a:bodyPr wrap="square">
+          <a:bodyPr wrap="square" anchor="t" lIns="0" rIns="0" tIns="0" bIns="0">
             <a:spAutoFit/>
           </a:bodyPr>
           <a:lstStyle/>
           <a:p>
-            <a:pPr algn="l">
-              <a:spcAft>
-                <a:spcPts val="800"/>
-              </a:spcAft>
-            </a:pPr>
-            <a:r>
-              <a:rPr sz="1600" b="0">
-                <a:solidFill>
-                  <a:srgbClr val="595959"/>
-                </a:solidFill>
-                <a:latin typeface="Calibri"/>
+            <a:pPr algn="l"/>
+            <a:r>
+              <a:rPr sz="3400" b="1">
+                <a:solidFill>
+                  <a:srgbClr val="36362F"/>
+                </a:solidFill>
+                <a:latin typeface="Source Sans Pro"/>
               </a:rPr>
-              <a:t>If something is wrong, we can find out why in minutes</a:t>
-            </a:r>
-          </a:p>
-        </p:txBody>
-      </p:sp>
-      <p:sp>
-        <p:nvSpPr>
-          <p:cNvPr id="5" name="Rounded Rectangle 4"/>
+              <a:t>Every output can be traced back</a:t>
+            </a:r>
+          </a:p>
+        </p:txBody>
+      </p:sp>
+      <p:sp>
+        <p:nvSpPr>
+          <p:cNvPr id="4" name="Rectangle 3"/>
           <p:cNvSpPr/>
           <p:nvPr/>
         </p:nvSpPr>
         <p:spPr>
           <a:xfrm>
-            <a:off x="731520" y="1874519"/>
-            <a:ext cx="5166360" cy="1874519"/>
-          </a:xfrm>
-          <a:prstGeom prst="roundRect">
+            <a:off x="594360" y="987552"/>
+            <a:ext cx="732536" cy="38100"/>
+          </a:xfrm>
+          <a:prstGeom prst="rect">
             <a:avLst/>
           </a:prstGeom>
           <a:solidFill>
-            <a:srgbClr val="F2F5FA"/>
+            <a:srgbClr val="A20A29"/>
           </a:solidFill>
           <a:ln>
-            <a:solidFill>
-              <a:srgbClr val="D5DEEA"/>
-            </a:solidFill>
+            <a:noFill/>
           </a:ln>
           <a:effectLst/>
         </p:spPr>
@@ -5092,58 +5474,68 @@
           </a:fontRef>
         </p:style>
         <p:txBody>
-          <a:bodyPr rtlCol="0" anchor="t" wrap="square" lIns="274320" rIns="274320" tIns="228600"/>
+          <a:bodyPr rtlCol="0" anchor="ctr"/>
+          <a:lstStyle/>
+          <a:p>
+            <a:pPr algn="ctr"/>
+          </a:p>
+        </p:txBody>
+      </p:sp>
+      <p:sp>
+        <p:nvSpPr>
+          <p:cNvPr id="5" name="TextBox 4"/>
+          <p:cNvSpPr txBox="1"/>
+          <p:nvPr/>
+        </p:nvSpPr>
+        <p:spPr>
+          <a:xfrm>
+            <a:off x="548640" y="1115568"/>
+            <a:ext cx="11064240" cy="457200"/>
+          </a:xfrm>
+          <a:prstGeom prst="rect">
+            <a:avLst/>
+          </a:prstGeom>
+          <a:noFill/>
+        </p:spPr>
+        <p:txBody>
+          <a:bodyPr wrap="square" anchor="t" lIns="0" rIns="0" tIns="0" bIns="0">
+            <a:spAutoFit/>
+          </a:bodyPr>
           <a:lstStyle/>
           <a:p>
             <a:pPr algn="l"/>
             <a:r>
-              <a:rPr sz="2000" b="1">
-                <a:solidFill>
-                  <a:srgbClr val="1F3864"/>
-                </a:solidFill>
-                <a:latin typeface="Calibri"/>
+              <a:rPr sz="1600" b="0">
+                <a:solidFill>
+                  <a:srgbClr val="525146"/>
+                </a:solidFill>
+                <a:latin typeface="Source Sans Pro"/>
               </a:rPr>
-              <a:t>Provenance ledger</a:t>
-            </a:r>
-          </a:p>
-          <a:p>
-            <a:pPr algn="l">
-              <a:spcBef>
-                <a:spcPts val="800"/>
-              </a:spcBef>
-            </a:pPr>
-            <a:r>
-              <a:rPr sz="1500">
-                <a:solidFill>
-                  <a:srgbClr val="595959"/>
-                </a:solidFill>
-                <a:latin typeface="Calibri"/>
-              </a:rPr>
-              <a:t>A tamper-evident record of every artifact: who made it, when, and from what input.</a:t>
-            </a:r>
-          </a:p>
-        </p:txBody>
-      </p:sp>
-      <p:sp>
-        <p:nvSpPr>
-          <p:cNvPr id="6" name="Rounded Rectangle 5"/>
+              <a:t>If something is wrong, we can find out why in minutes</a:t>
+            </a:r>
+          </a:p>
+        </p:txBody>
+      </p:sp>
+      <p:sp>
+        <p:nvSpPr>
+          <p:cNvPr id="6" name="Rectangle 5"/>
           <p:cNvSpPr/>
           <p:nvPr/>
         </p:nvSpPr>
         <p:spPr>
           <a:xfrm>
-            <a:off x="6309360" y="1874519"/>
+            <a:off x="731520" y="1874519"/>
             <a:ext cx="5166360" cy="1874519"/>
           </a:xfrm>
-          <a:prstGeom prst="roundRect">
+          <a:prstGeom prst="rect">
             <a:avLst/>
           </a:prstGeom>
           <a:solidFill>
-            <a:srgbClr val="F2F5FA"/>
+            <a:srgbClr val="FFFFFF"/>
           </a:solidFill>
-          <a:ln>
+          <a:ln w="12700">
             <a:solidFill>
-              <a:srgbClr val="D5DEEA"/>
+              <a:srgbClr val="D2D2CF"/>
             </a:solidFill>
           </a:ln>
           <a:effectLst/>
@@ -5163,59 +5555,32 @@
           </a:fontRef>
         </p:style>
         <p:txBody>
-          <a:bodyPr rtlCol="0" anchor="t" wrap="square" lIns="274320" rIns="274320" tIns="228600"/>
-          <a:lstStyle/>
-          <a:p>
-            <a:pPr algn="l"/>
-            <a:r>
-              <a:rPr sz="2000" b="1">
-                <a:solidFill>
-                  <a:srgbClr val="1F3864"/>
-                </a:solidFill>
-                <a:latin typeface="Calibri"/>
-              </a:rPr>
-              <a:t>Traceability matrix</a:t>
-            </a:r>
-          </a:p>
-          <a:p>
-            <a:pPr algn="l">
-              <a:spcBef>
-                <a:spcPts val="800"/>
-              </a:spcBef>
-            </a:pPr>
-            <a:r>
-              <a:rPr sz="1500">
-                <a:solidFill>
-                  <a:srgbClr val="595959"/>
-                </a:solidFill>
-                <a:latin typeface="Calibri"/>
-              </a:rPr>
-              <a:t>Requirement → design → story → code → test → release, linked end to end. A defect traces backward in one lookup.</a:t>
-            </a:r>
-          </a:p>
-        </p:txBody>
-      </p:sp>
-      <p:sp>
-        <p:nvSpPr>
-          <p:cNvPr id="7" name="Rounded Rectangle 6"/>
+          <a:bodyPr rtlCol="0" anchor="ctr"/>
+          <a:lstStyle/>
+          <a:p>
+            <a:pPr algn="ctr"/>
+          </a:p>
+        </p:txBody>
+      </p:sp>
+      <p:sp>
+        <p:nvSpPr>
+          <p:cNvPr id="7" name="Rectangle 6"/>
           <p:cNvSpPr/>
           <p:nvPr/>
         </p:nvSpPr>
         <p:spPr>
           <a:xfrm>
-            <a:off x="731520" y="3977639"/>
-            <a:ext cx="5166360" cy="1874519"/>
-          </a:xfrm>
-          <a:prstGeom prst="roundRect">
+            <a:off x="731520" y="1874519"/>
+            <a:ext cx="38100" cy="1874519"/>
+          </a:xfrm>
+          <a:prstGeom prst="rect">
             <a:avLst/>
           </a:prstGeom>
           <a:solidFill>
-            <a:srgbClr val="F2F5FA"/>
+            <a:srgbClr val="A20A29"/>
           </a:solidFill>
           <a:ln>
-            <a:solidFill>
-              <a:srgbClr val="D5DEEA"/>
-            </a:solidFill>
+            <a:noFill/>
           </a:ln>
           <a:effectLst/>
         </p:spPr>
@@ -5234,58 +5599,80 @@
           </a:fontRef>
         </p:style>
         <p:txBody>
-          <a:bodyPr rtlCol="0" anchor="t" wrap="square" lIns="274320" rIns="274320" tIns="228600"/>
+          <a:bodyPr rtlCol="0" anchor="ctr"/>
+          <a:lstStyle/>
+          <a:p>
+            <a:pPr algn="ctr"/>
+          </a:p>
+        </p:txBody>
+      </p:sp>
+      <p:sp>
+        <p:nvSpPr>
+          <p:cNvPr id="8" name="TextBox 7"/>
+          <p:cNvSpPr txBox="1"/>
+          <p:nvPr/>
+        </p:nvSpPr>
+        <p:spPr>
+          <a:xfrm>
+            <a:off x="1005840" y="2103119"/>
+            <a:ext cx="4700000" cy="1420000"/>
+          </a:xfrm>
+          <a:prstGeom prst="rect">
+            <a:avLst/>
+          </a:prstGeom>
+          <a:noFill/>
+        </p:spPr>
+        <p:txBody>
+          <a:bodyPr wrap="square" anchor="t" lIns="0" rIns="0" tIns="0" bIns="0">
+            <a:spAutoFit/>
+          </a:bodyPr>
           <a:lstStyle/>
           <a:p>
             <a:pPr algn="l"/>
             <a:r>
               <a:rPr sz="2000" b="1">
                 <a:solidFill>
-                  <a:srgbClr val="1F3864"/>
-                </a:solidFill>
-                <a:latin typeface="Calibri"/>
+                  <a:srgbClr val="36362F"/>
+                </a:solidFill>
+                <a:latin typeface="Source Sans Pro"/>
               </a:rPr>
-              <a:t>Activity log</a:t>
-            </a:r>
-          </a:p>
-          <a:p>
-            <a:pPr algn="l">
-              <a:spcBef>
-                <a:spcPts val="800"/>
-              </a:spcBef>
-            </a:pPr>
-            <a:r>
-              <a:rPr sz="1500">
-                <a:solidFill>
-                  <a:srgbClr val="595959"/>
-                </a:solidFill>
-                <a:latin typeface="Calibri"/>
+              <a:t>Provenance ledger</a:t>
+            </a:r>
+          </a:p>
+          <a:p>
+            <a:pPr algn="l"/>
+            <a:r>
+              <a:rPr sz="1500" b="0">
+                <a:solidFill>
+                  <a:srgbClr val="525146"/>
+                </a:solidFill>
+                <a:latin typeface="Source Sans Pro"/>
               </a:rPr>
-              <a:t>Every AI session logged: what it did, how long it took, what it produced. Shows real velocity and real bottlenecks.</a:t>
-            </a:r>
-          </a:p>
-        </p:txBody>
-      </p:sp>
-      <p:sp>
-        <p:nvSpPr>
-          <p:cNvPr id="8" name="Rounded Rectangle 7"/>
+              <a:t>A tamper-evident record of every artifact: who made it, when, and from what input.</a:t>
+            </a:r>
+          </a:p>
+        </p:txBody>
+      </p:sp>
+      <p:sp>
+        <p:nvSpPr>
+          <p:cNvPr id="9" name="Rectangle 8"/>
           <p:cNvSpPr/>
           <p:nvPr/>
         </p:nvSpPr>
         <p:spPr>
           <a:xfrm>
-            <a:off x="6309360" y="3977639"/>
+            <a:off x="6309360" y="1874519"/>
             <a:ext cx="5166360" cy="1874519"/>
           </a:xfrm>
-          <a:prstGeom prst="roundRect">
+          <a:prstGeom prst="rect">
             <a:avLst/>
           </a:prstGeom>
           <a:solidFill>
-            <a:srgbClr val="F2F5FA"/>
+            <a:srgbClr val="FFFFFF"/>
           </a:solidFill>
-          <a:ln>
+          <a:ln w="12700">
             <a:solidFill>
-              <a:srgbClr val="D5DEEA"/>
+              <a:srgbClr val="D2D2CF"/>
             </a:solidFill>
           </a:ln>
           <a:effectLst/>
@@ -5305,32 +5692,372 @@
           </a:fontRef>
         </p:style>
         <p:txBody>
-          <a:bodyPr rtlCol="0" anchor="t" wrap="square" lIns="274320" rIns="274320" tIns="228600"/>
+          <a:bodyPr rtlCol="0" anchor="ctr"/>
+          <a:lstStyle/>
+          <a:p>
+            <a:pPr algn="ctr"/>
+          </a:p>
+        </p:txBody>
+      </p:sp>
+      <p:sp>
+        <p:nvSpPr>
+          <p:cNvPr id="10" name="Rectangle 9"/>
+          <p:cNvSpPr/>
+          <p:nvPr/>
+        </p:nvSpPr>
+        <p:spPr>
+          <a:xfrm>
+            <a:off x="6309360" y="1874519"/>
+            <a:ext cx="38100" cy="1874519"/>
+          </a:xfrm>
+          <a:prstGeom prst="rect">
+            <a:avLst/>
+          </a:prstGeom>
+          <a:solidFill>
+            <a:srgbClr val="A20A29"/>
+          </a:solidFill>
+          <a:ln>
+            <a:noFill/>
+          </a:ln>
+          <a:effectLst/>
+        </p:spPr>
+        <p:style>
+          <a:lnRef idx="1">
+            <a:schemeClr val="accent1"/>
+          </a:lnRef>
+          <a:fillRef idx="3">
+            <a:schemeClr val="accent1"/>
+          </a:fillRef>
+          <a:effectRef idx="2">
+            <a:schemeClr val="accent1"/>
+          </a:effectRef>
+          <a:fontRef idx="minor">
+            <a:schemeClr val="lt1"/>
+          </a:fontRef>
+        </p:style>
+        <p:txBody>
+          <a:bodyPr rtlCol="0" anchor="ctr"/>
+          <a:lstStyle/>
+          <a:p>
+            <a:pPr algn="ctr"/>
+          </a:p>
+        </p:txBody>
+      </p:sp>
+      <p:sp>
+        <p:nvSpPr>
+          <p:cNvPr id="11" name="TextBox 10"/>
+          <p:cNvSpPr txBox="1"/>
+          <p:nvPr/>
+        </p:nvSpPr>
+        <p:spPr>
+          <a:xfrm>
+            <a:off x="6583680" y="2103119"/>
+            <a:ext cx="4700000" cy="1420000"/>
+          </a:xfrm>
+          <a:prstGeom prst="rect">
+            <a:avLst/>
+          </a:prstGeom>
+          <a:noFill/>
+        </p:spPr>
+        <p:txBody>
+          <a:bodyPr wrap="square" anchor="t" lIns="0" rIns="0" tIns="0" bIns="0">
+            <a:spAutoFit/>
+          </a:bodyPr>
           <a:lstStyle/>
           <a:p>
             <a:pPr algn="l"/>
             <a:r>
               <a:rPr sz="2000" b="1">
                 <a:solidFill>
-                  <a:srgbClr val="1F3864"/>
-                </a:solidFill>
-                <a:latin typeface="Calibri"/>
+                  <a:srgbClr val="36362F"/>
+                </a:solidFill>
+                <a:latin typeface="Source Sans Pro"/>
+              </a:rPr>
+              <a:t>Traceability matrix</a:t>
+            </a:r>
+          </a:p>
+          <a:p>
+            <a:pPr algn="l"/>
+            <a:r>
+              <a:rPr sz="1500" b="0">
+                <a:solidFill>
+                  <a:srgbClr val="525146"/>
+                </a:solidFill>
+                <a:latin typeface="Source Sans Pro"/>
+              </a:rPr>
+              <a:t>Requirement → design → story → code → test → release, linked end to end. A defect traces backward in one lookup.</a:t>
+            </a:r>
+          </a:p>
+        </p:txBody>
+      </p:sp>
+      <p:sp>
+        <p:nvSpPr>
+          <p:cNvPr id="12" name="Rectangle 11"/>
+          <p:cNvSpPr/>
+          <p:nvPr/>
+        </p:nvSpPr>
+        <p:spPr>
+          <a:xfrm>
+            <a:off x="731520" y="3977639"/>
+            <a:ext cx="5166360" cy="1874519"/>
+          </a:xfrm>
+          <a:prstGeom prst="rect">
+            <a:avLst/>
+          </a:prstGeom>
+          <a:solidFill>
+            <a:srgbClr val="FFFFFF"/>
+          </a:solidFill>
+          <a:ln w="12700">
+            <a:solidFill>
+              <a:srgbClr val="D2D2CF"/>
+            </a:solidFill>
+          </a:ln>
+          <a:effectLst/>
+        </p:spPr>
+        <p:style>
+          <a:lnRef idx="1">
+            <a:schemeClr val="accent1"/>
+          </a:lnRef>
+          <a:fillRef idx="3">
+            <a:schemeClr val="accent1"/>
+          </a:fillRef>
+          <a:effectRef idx="2">
+            <a:schemeClr val="accent1"/>
+          </a:effectRef>
+          <a:fontRef idx="minor">
+            <a:schemeClr val="lt1"/>
+          </a:fontRef>
+        </p:style>
+        <p:txBody>
+          <a:bodyPr rtlCol="0" anchor="ctr"/>
+          <a:lstStyle/>
+          <a:p>
+            <a:pPr algn="ctr"/>
+          </a:p>
+        </p:txBody>
+      </p:sp>
+      <p:sp>
+        <p:nvSpPr>
+          <p:cNvPr id="13" name="Rectangle 12"/>
+          <p:cNvSpPr/>
+          <p:nvPr/>
+        </p:nvSpPr>
+        <p:spPr>
+          <a:xfrm>
+            <a:off x="731520" y="3977639"/>
+            <a:ext cx="38100" cy="1874519"/>
+          </a:xfrm>
+          <a:prstGeom prst="rect">
+            <a:avLst/>
+          </a:prstGeom>
+          <a:solidFill>
+            <a:srgbClr val="A20A29"/>
+          </a:solidFill>
+          <a:ln>
+            <a:noFill/>
+          </a:ln>
+          <a:effectLst/>
+        </p:spPr>
+        <p:style>
+          <a:lnRef idx="1">
+            <a:schemeClr val="accent1"/>
+          </a:lnRef>
+          <a:fillRef idx="3">
+            <a:schemeClr val="accent1"/>
+          </a:fillRef>
+          <a:effectRef idx="2">
+            <a:schemeClr val="accent1"/>
+          </a:effectRef>
+          <a:fontRef idx="minor">
+            <a:schemeClr val="lt1"/>
+          </a:fontRef>
+        </p:style>
+        <p:txBody>
+          <a:bodyPr rtlCol="0" anchor="ctr"/>
+          <a:lstStyle/>
+          <a:p>
+            <a:pPr algn="ctr"/>
+          </a:p>
+        </p:txBody>
+      </p:sp>
+      <p:sp>
+        <p:nvSpPr>
+          <p:cNvPr id="14" name="TextBox 13"/>
+          <p:cNvSpPr txBox="1"/>
+          <p:nvPr/>
+        </p:nvSpPr>
+        <p:spPr>
+          <a:xfrm>
+            <a:off x="1005840" y="4206239"/>
+            <a:ext cx="4700000" cy="1420000"/>
+          </a:xfrm>
+          <a:prstGeom prst="rect">
+            <a:avLst/>
+          </a:prstGeom>
+          <a:noFill/>
+        </p:spPr>
+        <p:txBody>
+          <a:bodyPr wrap="square" anchor="t" lIns="0" rIns="0" tIns="0" bIns="0">
+            <a:spAutoFit/>
+          </a:bodyPr>
+          <a:lstStyle/>
+          <a:p>
+            <a:pPr algn="l"/>
+            <a:r>
+              <a:rPr sz="2000" b="1">
+                <a:solidFill>
+                  <a:srgbClr val="36362F"/>
+                </a:solidFill>
+                <a:latin typeface="Source Sans Pro"/>
+              </a:rPr>
+              <a:t>Activity log</a:t>
+            </a:r>
+          </a:p>
+          <a:p>
+            <a:pPr algn="l"/>
+            <a:r>
+              <a:rPr sz="1500" b="0">
+                <a:solidFill>
+                  <a:srgbClr val="525146"/>
+                </a:solidFill>
+                <a:latin typeface="Source Sans Pro"/>
+              </a:rPr>
+              <a:t>Every AI session logged: what it did, how long it took, what it produced. Shows real velocity and real bottlenecks.</a:t>
+            </a:r>
+          </a:p>
+        </p:txBody>
+      </p:sp>
+      <p:sp>
+        <p:nvSpPr>
+          <p:cNvPr id="15" name="Rectangle 14"/>
+          <p:cNvSpPr/>
+          <p:nvPr/>
+        </p:nvSpPr>
+        <p:spPr>
+          <a:xfrm>
+            <a:off x="6309360" y="3977639"/>
+            <a:ext cx="5166360" cy="1874519"/>
+          </a:xfrm>
+          <a:prstGeom prst="rect">
+            <a:avLst/>
+          </a:prstGeom>
+          <a:solidFill>
+            <a:srgbClr val="FFFFFF"/>
+          </a:solidFill>
+          <a:ln w="12700">
+            <a:solidFill>
+              <a:srgbClr val="D2D2CF"/>
+            </a:solidFill>
+          </a:ln>
+          <a:effectLst/>
+        </p:spPr>
+        <p:style>
+          <a:lnRef idx="1">
+            <a:schemeClr val="accent1"/>
+          </a:lnRef>
+          <a:fillRef idx="3">
+            <a:schemeClr val="accent1"/>
+          </a:fillRef>
+          <a:effectRef idx="2">
+            <a:schemeClr val="accent1"/>
+          </a:effectRef>
+          <a:fontRef idx="minor">
+            <a:schemeClr val="lt1"/>
+          </a:fontRef>
+        </p:style>
+        <p:txBody>
+          <a:bodyPr rtlCol="0" anchor="ctr"/>
+          <a:lstStyle/>
+          <a:p>
+            <a:pPr algn="ctr"/>
+          </a:p>
+        </p:txBody>
+      </p:sp>
+      <p:sp>
+        <p:nvSpPr>
+          <p:cNvPr id="16" name="Rectangle 15"/>
+          <p:cNvSpPr/>
+          <p:nvPr/>
+        </p:nvSpPr>
+        <p:spPr>
+          <a:xfrm>
+            <a:off x="6309360" y="3977639"/>
+            <a:ext cx="38100" cy="1874519"/>
+          </a:xfrm>
+          <a:prstGeom prst="rect">
+            <a:avLst/>
+          </a:prstGeom>
+          <a:solidFill>
+            <a:srgbClr val="A20A29"/>
+          </a:solidFill>
+          <a:ln>
+            <a:noFill/>
+          </a:ln>
+          <a:effectLst/>
+        </p:spPr>
+        <p:style>
+          <a:lnRef idx="1">
+            <a:schemeClr val="accent1"/>
+          </a:lnRef>
+          <a:fillRef idx="3">
+            <a:schemeClr val="accent1"/>
+          </a:fillRef>
+          <a:effectRef idx="2">
+            <a:schemeClr val="accent1"/>
+          </a:effectRef>
+          <a:fontRef idx="minor">
+            <a:schemeClr val="lt1"/>
+          </a:fontRef>
+        </p:style>
+        <p:txBody>
+          <a:bodyPr rtlCol="0" anchor="ctr"/>
+          <a:lstStyle/>
+          <a:p>
+            <a:pPr algn="ctr"/>
+          </a:p>
+        </p:txBody>
+      </p:sp>
+      <p:sp>
+        <p:nvSpPr>
+          <p:cNvPr id="17" name="TextBox 16"/>
+          <p:cNvSpPr txBox="1"/>
+          <p:nvPr/>
+        </p:nvSpPr>
+        <p:spPr>
+          <a:xfrm>
+            <a:off x="6583680" y="4206239"/>
+            <a:ext cx="4700000" cy="1420000"/>
+          </a:xfrm>
+          <a:prstGeom prst="rect">
+            <a:avLst/>
+          </a:prstGeom>
+          <a:noFill/>
+        </p:spPr>
+        <p:txBody>
+          <a:bodyPr wrap="square" anchor="t" lIns="0" rIns="0" tIns="0" bIns="0">
+            <a:spAutoFit/>
+          </a:bodyPr>
+          <a:lstStyle/>
+          <a:p>
+            <a:pPr algn="l"/>
+            <a:r>
+              <a:rPr sz="2000" b="1">
+                <a:solidFill>
+                  <a:srgbClr val="36362F"/>
+                </a:solidFill>
+                <a:latin typeface="Source Sans Pro"/>
               </a:rPr>
               <a:t>Staleness detection</a:t>
             </a:r>
           </a:p>
           <a:p>
-            <a:pPr algn="l">
-              <a:spcBef>
-                <a:spcPts val="800"/>
-              </a:spcBef>
-            </a:pPr>
-            <a:r>
-              <a:rPr sz="1500">
-                <a:solidFill>
-                  <a:srgbClr val="595959"/>
-                </a:solidFill>
-                <a:latin typeface="Calibri"/>
+            <a:pPr algn="l"/>
+            <a:r>
+              <a:rPr sz="1500" b="0">
+                <a:solidFill>
+                  <a:srgbClr val="525146"/>
+                </a:solidFill>
+                <a:latin typeface="Source Sans Pro"/>
               </a:rPr>
               <a:t>If a design changes, everything built on it is flagged out-of-date and must be refreshed before release.</a:t>
             </a:r>
@@ -5357,59 +6084,20 @@
       <p:grpSpPr/>
       <p:sp>
         <p:nvSpPr>
-          <p:cNvPr id="2" name="TextBox 1"/>
-          <p:cNvSpPr txBox="1"/>
-          <p:nvPr/>
-        </p:nvSpPr>
-        <p:spPr>
-          <a:xfrm>
-            <a:off x="548640" y="320040"/>
-            <a:ext cx="11064240" cy="685800"/>
-          </a:xfrm>
-          <a:prstGeom prst="rect">
-            <a:avLst/>
-          </a:prstGeom>
-          <a:noFill/>
-        </p:spPr>
-        <p:txBody>
-          <a:bodyPr wrap="square">
-            <a:spAutoFit/>
-          </a:bodyPr>
-          <a:lstStyle/>
-          <a:p>
-            <a:pPr algn="l">
-              <a:spcAft>
-                <a:spcPts val="800"/>
-              </a:spcAft>
-            </a:pPr>
-            <a:r>
-              <a:rPr sz="3400" b="1">
-                <a:solidFill>
-                  <a:srgbClr val="1F3864"/>
-                </a:solidFill>
-                <a:latin typeface="Calibri"/>
-              </a:rPr>
-              <a:t>The ten building blocks</a:t>
-            </a:r>
-          </a:p>
-        </p:txBody>
-      </p:sp>
-      <p:sp>
-        <p:nvSpPr>
-          <p:cNvPr id="3" name="Rectangle 2"/>
+          <p:cNvPr id="2" name="Rectangle 1"/>
           <p:cNvSpPr/>
           <p:nvPr/>
         </p:nvSpPr>
         <p:spPr>
           <a:xfrm>
-            <a:off x="594360" y="987552"/>
-            <a:ext cx="2011680" cy="38100"/>
+            <a:off x="0" y="0"/>
+            <a:ext cx="12191695" cy="6858000"/>
           </a:xfrm>
           <a:prstGeom prst="rect">
             <a:avLst/>
           </a:prstGeom>
           <a:solidFill>
-            <a:srgbClr val="2E74B5"/>
+            <a:srgbClr val="F0F0EC"/>
           </a:solidFill>
           <a:ln>
             <a:noFill/>
@@ -5440,14 +6128,14 @@
       </p:sp>
       <p:sp>
         <p:nvSpPr>
-          <p:cNvPr id="4" name="TextBox 3"/>
+          <p:cNvPr id="3" name="TextBox 2"/>
           <p:cNvSpPr txBox="1"/>
           <p:nvPr/>
         </p:nvSpPr>
         <p:spPr>
           <a:xfrm>
-            <a:off x="548640" y="1115568"/>
-            <a:ext cx="11064240" cy="457200"/>
+            <a:off x="548640" y="320040"/>
+            <a:ext cx="11064240" cy="685800"/>
           </a:xfrm>
           <a:prstGeom prst="rect">
             <a:avLst/>
@@ -5455,49 +6143,43 @@
           <a:noFill/>
         </p:spPr>
         <p:txBody>
-          <a:bodyPr wrap="square">
+          <a:bodyPr wrap="square" anchor="t" lIns="0" rIns="0" tIns="0" bIns="0">
             <a:spAutoFit/>
           </a:bodyPr>
           <a:lstStyle/>
           <a:p>
-            <a:pPr algn="l">
-              <a:spcAft>
-                <a:spcPts val="800"/>
-              </a:spcAft>
-            </a:pPr>
-            <a:r>
-              <a:rPr sz="1600" b="0">
-                <a:solidFill>
-                  <a:srgbClr val="595959"/>
-                </a:solidFill>
-                <a:latin typeface="Calibri"/>
+            <a:pPr algn="l"/>
+            <a:r>
+              <a:rPr sz="3400" b="1">
+                <a:solidFill>
+                  <a:srgbClr val="36362F"/>
+                </a:solidFill>
+                <a:latin typeface="Source Sans Pro"/>
               </a:rPr>
-              <a:t>Grouped by what they do for us</a:t>
-            </a:r>
-          </a:p>
-        </p:txBody>
-      </p:sp>
-      <p:sp>
-        <p:nvSpPr>
-          <p:cNvPr id="5" name="Rounded Rectangle 4"/>
+              <a:t>The ten building blocks</a:t>
+            </a:r>
+          </a:p>
+        </p:txBody>
+      </p:sp>
+      <p:sp>
+        <p:nvSpPr>
+          <p:cNvPr id="4" name="Rectangle 3"/>
           <p:cNvSpPr/>
           <p:nvPr/>
         </p:nvSpPr>
         <p:spPr>
           <a:xfrm>
-            <a:off x="731520" y="1874519"/>
-            <a:ext cx="3429000" cy="3977639"/>
-          </a:xfrm>
-          <a:prstGeom prst="roundRect">
+            <a:off x="594360" y="987552"/>
+            <a:ext cx="732536" cy="38100"/>
+          </a:xfrm>
+          <a:prstGeom prst="rect">
             <a:avLst/>
           </a:prstGeom>
           <a:solidFill>
-            <a:srgbClr val="F2F5FA"/>
+            <a:srgbClr val="A20A29"/>
           </a:solidFill>
           <a:ln>
-            <a:solidFill>
-              <a:srgbClr val="D5DEEA"/>
-            </a:solidFill>
+            <a:noFill/>
           </a:ln>
           <a:effectLst/>
         </p:spPr>
@@ -5518,12 +6200,95 @@
         <p:txBody>
           <a:bodyPr rtlCol="0" anchor="ctr"/>
           <a:lstStyle/>
-          <a:p/>
-        </p:txBody>
-      </p:sp>
-      <p:sp>
-        <p:nvSpPr>
-          <p:cNvPr id="6" name="Rounded Rectangle 5"/>
+          <a:p>
+            <a:pPr algn="ctr"/>
+          </a:p>
+        </p:txBody>
+      </p:sp>
+      <p:sp>
+        <p:nvSpPr>
+          <p:cNvPr id="5" name="TextBox 4"/>
+          <p:cNvSpPr txBox="1"/>
+          <p:nvPr/>
+        </p:nvSpPr>
+        <p:spPr>
+          <a:xfrm>
+            <a:off x="548640" y="1115568"/>
+            <a:ext cx="11064240" cy="457200"/>
+          </a:xfrm>
+          <a:prstGeom prst="rect">
+            <a:avLst/>
+          </a:prstGeom>
+          <a:noFill/>
+        </p:spPr>
+        <p:txBody>
+          <a:bodyPr wrap="square" anchor="t" lIns="0" rIns="0" tIns="0" bIns="0">
+            <a:spAutoFit/>
+          </a:bodyPr>
+          <a:lstStyle/>
+          <a:p>
+            <a:pPr algn="l"/>
+            <a:r>
+              <a:rPr sz="1600" b="0">
+                <a:solidFill>
+                  <a:srgbClr val="525146"/>
+                </a:solidFill>
+                <a:latin typeface="Source Sans Pro"/>
+              </a:rPr>
+              <a:t>Grouped by what they do for us</a:t>
+            </a:r>
+          </a:p>
+        </p:txBody>
+      </p:sp>
+      <p:sp>
+        <p:nvSpPr>
+          <p:cNvPr id="6" name="Rectangle 5"/>
+          <p:cNvSpPr/>
+          <p:nvPr/>
+        </p:nvSpPr>
+        <p:spPr>
+          <a:xfrm>
+            <a:off x="731520" y="1874519"/>
+            <a:ext cx="3429000" cy="3977639"/>
+          </a:xfrm>
+          <a:prstGeom prst="rect">
+            <a:avLst/>
+          </a:prstGeom>
+          <a:solidFill>
+            <a:srgbClr val="FFFFFF"/>
+          </a:solidFill>
+          <a:ln w="12700">
+            <a:solidFill>
+              <a:srgbClr val="D2D2CF"/>
+            </a:solidFill>
+          </a:ln>
+          <a:effectLst/>
+        </p:spPr>
+        <p:style>
+          <a:lnRef idx="1">
+            <a:schemeClr val="accent1"/>
+          </a:lnRef>
+          <a:fillRef idx="3">
+            <a:schemeClr val="accent1"/>
+          </a:fillRef>
+          <a:effectRef idx="2">
+            <a:schemeClr val="accent1"/>
+          </a:effectRef>
+          <a:fontRef idx="minor">
+            <a:schemeClr val="lt1"/>
+          </a:fontRef>
+        </p:style>
+        <p:txBody>
+          <a:bodyPr rtlCol="0" anchor="ctr"/>
+          <a:lstStyle/>
+          <a:p>
+            <a:pPr algn="ctr"/>
+          </a:p>
+        </p:txBody>
+      </p:sp>
+      <p:sp>
+        <p:nvSpPr>
+          <p:cNvPr id="7" name="Rectangle 6"/>
           <p:cNvSpPr/>
           <p:nvPr/>
         </p:nvSpPr>
@@ -5532,11 +6297,11 @@
             <a:off x="960120" y="2148840"/>
             <a:ext cx="2971800" cy="548640"/>
           </a:xfrm>
-          <a:prstGeom prst="roundRect">
+          <a:prstGeom prst="rect">
             <a:avLst/>
           </a:prstGeom>
           <a:solidFill>
-            <a:srgbClr val="2E74B5"/>
+            <a:srgbClr val="A20A29"/>
           </a:solidFill>
           <a:ln>
             <a:noFill/>
@@ -5558,16 +6323,42 @@
           </a:fontRef>
         </p:style>
         <p:txBody>
-          <a:bodyPr rtlCol="0" anchor="ctr" wrap="square" lIns="45720" rIns="45720"/>
+          <a:bodyPr rtlCol="0" anchor="ctr"/>
           <a:lstStyle/>
           <a:p>
             <a:pPr algn="ctr"/>
-            <a:r>
-              <a:rPr sz="1600" b="1">
+          </a:p>
+        </p:txBody>
+      </p:sp>
+      <p:sp>
+        <p:nvSpPr>
+          <p:cNvPr id="8" name="TextBox 7"/>
+          <p:cNvSpPr txBox="1"/>
+          <p:nvPr/>
+        </p:nvSpPr>
+        <p:spPr>
+          <a:xfrm>
+            <a:off x="960120" y="2148840"/>
+            <a:ext cx="2971800" cy="548640"/>
+          </a:xfrm>
+          <a:prstGeom prst="rect">
+            <a:avLst/>
+          </a:prstGeom>
+          <a:noFill/>
+        </p:spPr>
+        <p:txBody>
+          <a:bodyPr wrap="square" anchor="ctr" lIns="0" rIns="0" tIns="0" bIns="0">
+            <a:spAutoFit/>
+          </a:bodyPr>
+          <a:lstStyle/>
+          <a:p>
+            <a:pPr algn="ctr"/>
+            <a:r>
+              <a:rPr sz="1500" b="1">
                 <a:solidFill>
                   <a:srgbClr val="FFFFFF"/>
                 </a:solidFill>
-                <a:latin typeface="Calibri"/>
+                <a:latin typeface="Source Sans Pro"/>
               </a:rPr>
               <a:t>CONTROL</a:t>
             </a:r>
@@ -5576,7 +6367,7 @@
       </p:sp>
       <p:sp>
         <p:nvSpPr>
-          <p:cNvPr id="7" name="TextBox 6"/>
+          <p:cNvPr id="9" name="TextBox 8"/>
           <p:cNvSpPr txBox="1"/>
           <p:nvPr/>
         </p:nvSpPr>
@@ -5591,22 +6382,18 @@
           <a:noFill/>
         </p:spPr>
         <p:txBody>
-          <a:bodyPr wrap="square">
+          <a:bodyPr wrap="square" anchor="t" lIns="0" rIns="0" tIns="0" bIns="0">
             <a:spAutoFit/>
           </a:bodyPr>
           <a:lstStyle/>
           <a:p>
-            <a:pPr algn="ctr">
-              <a:spcAft>
-                <a:spcPts val="800"/>
-              </a:spcAft>
-            </a:pPr>
+            <a:pPr algn="l"/>
             <a:r>
               <a:rPr sz="1400" b="0">
                 <a:solidFill>
-                  <a:srgbClr val="595959"/>
-                </a:solidFill>
-                <a:latin typeface="Calibri"/>
+                  <a:srgbClr val="525146"/>
+                </a:solidFill>
+                <a:latin typeface="Source Sans Pro"/>
               </a:rPr>
               <a:t>Keeps humans in charge</a:t>
             </a:r>
@@ -5615,7 +6402,7 @@
       </p:sp>
       <p:sp>
         <p:nvSpPr>
-          <p:cNvPr id="8" name="TextBox 7"/>
+          <p:cNvPr id="10" name="TextBox 9"/>
           <p:cNvSpPr txBox="1"/>
           <p:nvPr/>
         </p:nvSpPr>
@@ -5630,70 +6417,54 @@
           <a:noFill/>
         </p:spPr>
         <p:txBody>
-          <a:bodyPr wrap="square">
+          <a:bodyPr wrap="square" anchor="t" lIns="0" rIns="0" tIns="0" bIns="0">
             <a:spAutoFit/>
           </a:bodyPr>
           <a:lstStyle/>
           <a:p>
-            <a:pPr algn="l" marL="256032" indent="-256032">
-              <a:spcAft>
-                <a:spcPts val="1000"/>
-              </a:spcAft>
-            </a:pPr>
+            <a:pPr algn="l"/>
             <a:r>
               <a:rPr sz="1500" b="0">
                 <a:solidFill>
-                  <a:srgbClr val="1F3864"/>
-                </a:solidFill>
-                <a:latin typeface="Calibri"/>
+                  <a:srgbClr val="36362F"/>
+                </a:solidFill>
+                <a:latin typeface="Source Sans Pro"/>
               </a:rPr>
               <a:t>•  Gated pipeline (5 gates)</a:t>
             </a:r>
           </a:p>
           <a:p>
-            <a:pPr algn="l" marL="256032" indent="-256032">
-              <a:spcAft>
-                <a:spcPts val="1000"/>
-              </a:spcAft>
-            </a:pPr>
+            <a:pPr algn="l"/>
             <a:r>
               <a:rPr sz="1500" b="0">
                 <a:solidFill>
-                  <a:srgbClr val="1F3864"/>
-                </a:solidFill>
-                <a:latin typeface="Calibri"/>
+                  <a:srgbClr val="36362F"/>
+                </a:solidFill>
+                <a:latin typeface="Source Sans Pro"/>
               </a:rPr>
               <a:t>•  Completeness checks</a:t>
             </a:r>
           </a:p>
           <a:p>
-            <a:pPr algn="l" marL="256032" indent="-256032">
-              <a:spcAft>
-                <a:spcPts val="1000"/>
-              </a:spcAft>
-            </a:pPr>
+            <a:pPr algn="l"/>
             <a:r>
               <a:rPr sz="1500" b="0">
                 <a:solidFill>
-                  <a:srgbClr val="1F3864"/>
-                </a:solidFill>
-                <a:latin typeface="Calibri"/>
+                  <a:srgbClr val="36362F"/>
+                </a:solidFill>
+                <a:latin typeface="Source Sans Pro"/>
               </a:rPr>
               <a:t>•  Independent review</a:t>
             </a:r>
           </a:p>
           <a:p>
-            <a:pPr algn="l" marL="256032" indent="-256032">
-              <a:spcAft>
-                <a:spcPts val="1000"/>
-              </a:spcAft>
-            </a:pPr>
+            <a:pPr algn="l"/>
             <a:r>
               <a:rPr sz="1500" b="0">
                 <a:solidFill>
-                  <a:srgbClr val="1F3864"/>
-                </a:solidFill>
-                <a:latin typeface="Calibri"/>
+                  <a:srgbClr val="36362F"/>
+                </a:solidFill>
+                <a:latin typeface="Source Sans Pro"/>
               </a:rPr>
               <a:t>•  Staleness detection</a:t>
             </a:r>
@@ -5702,7 +6473,7 @@
       </p:sp>
       <p:sp>
         <p:nvSpPr>
-          <p:cNvPr id="9" name="Rounded Rectangle 8"/>
+          <p:cNvPr id="11" name="Rectangle 10"/>
           <p:cNvSpPr/>
           <p:nvPr/>
         </p:nvSpPr>
@@ -5711,15 +6482,15 @@
             <a:off x="4389120" y="1874519"/>
             <a:ext cx="3429000" cy="3977639"/>
           </a:xfrm>
-          <a:prstGeom prst="roundRect">
+          <a:prstGeom prst="rect">
             <a:avLst/>
           </a:prstGeom>
           <a:solidFill>
-            <a:srgbClr val="F2F5FA"/>
+            <a:srgbClr val="FFFFFF"/>
           </a:solidFill>
-          <a:ln>
+          <a:ln w="12700">
             <a:solidFill>
-              <a:srgbClr val="D5DEEA"/>
+              <a:srgbClr val="D2D2CF"/>
             </a:solidFill>
           </a:ln>
           <a:effectLst/>
@@ -5741,12 +6512,14 @@
         <p:txBody>
           <a:bodyPr rtlCol="0" anchor="ctr"/>
           <a:lstStyle/>
-          <a:p/>
-        </p:txBody>
-      </p:sp>
-      <p:sp>
-        <p:nvSpPr>
-          <p:cNvPr id="10" name="Rounded Rectangle 9"/>
+          <a:p>
+            <a:pPr algn="ctr"/>
+          </a:p>
+        </p:txBody>
+      </p:sp>
+      <p:sp>
+        <p:nvSpPr>
+          <p:cNvPr id="12" name="Rectangle 11"/>
           <p:cNvSpPr/>
           <p:nvPr/>
         </p:nvSpPr>
@@ -5755,11 +6528,11 @@
             <a:off x="4617720" y="2148840"/>
             <a:ext cx="2971800" cy="548640"/>
           </a:xfrm>
-          <a:prstGeom prst="roundRect">
+          <a:prstGeom prst="rect">
             <a:avLst/>
           </a:prstGeom>
           <a:solidFill>
-            <a:srgbClr val="2E7D32"/>
+            <a:srgbClr val="B48825"/>
           </a:solidFill>
           <a:ln>
             <a:noFill/>
@@ -5781,16 +6554,42 @@
           </a:fontRef>
         </p:style>
         <p:txBody>
-          <a:bodyPr rtlCol="0" anchor="ctr" wrap="square" lIns="45720" rIns="45720"/>
+          <a:bodyPr rtlCol="0" anchor="ctr"/>
           <a:lstStyle/>
           <a:p>
             <a:pPr algn="ctr"/>
-            <a:r>
-              <a:rPr sz="1600" b="1">
+          </a:p>
+        </p:txBody>
+      </p:sp>
+      <p:sp>
+        <p:nvSpPr>
+          <p:cNvPr id="13" name="TextBox 12"/>
+          <p:cNvSpPr txBox="1"/>
+          <p:nvPr/>
+        </p:nvSpPr>
+        <p:spPr>
+          <a:xfrm>
+            <a:off x="4617720" y="2148840"/>
+            <a:ext cx="2971800" cy="548640"/>
+          </a:xfrm>
+          <a:prstGeom prst="rect">
+            <a:avLst/>
+          </a:prstGeom>
+          <a:noFill/>
+        </p:spPr>
+        <p:txBody>
+          <a:bodyPr wrap="square" anchor="ctr" lIns="0" rIns="0" tIns="0" bIns="0">
+            <a:spAutoFit/>
+          </a:bodyPr>
+          <a:lstStyle/>
+          <a:p>
+            <a:pPr algn="ctr"/>
+            <a:r>
+              <a:rPr sz="1500" b="1">
                 <a:solidFill>
                   <a:srgbClr val="FFFFFF"/>
                 </a:solidFill>
-                <a:latin typeface="Calibri"/>
+                <a:latin typeface="Source Sans Pro"/>
               </a:rPr>
               <a:t>TRUST &amp; AUDIT</a:t>
             </a:r>
@@ -5799,13 +6598,13 @@
       </p:sp>
       <p:sp>
         <p:nvSpPr>
-          <p:cNvPr id="11" name="TextBox 10"/>
+          <p:cNvPr id="14" name="TextBox 13"/>
           <p:cNvSpPr txBox="1"/>
           <p:nvPr/>
         </p:nvSpPr>
         <p:spPr>
           <a:xfrm>
-            <a:off x="4709159" y="2880360"/>
+            <a:off x="4709160" y="2880360"/>
             <a:ext cx="2880360" cy="457200"/>
           </a:xfrm>
           <a:prstGeom prst="rect">
@@ -5814,22 +6613,18 @@
           <a:noFill/>
         </p:spPr>
         <p:txBody>
-          <a:bodyPr wrap="square">
+          <a:bodyPr wrap="square" anchor="t" lIns="0" rIns="0" tIns="0" bIns="0">
             <a:spAutoFit/>
           </a:bodyPr>
           <a:lstStyle/>
           <a:p>
-            <a:pPr algn="ctr">
-              <a:spcAft>
-                <a:spcPts val="800"/>
-              </a:spcAft>
-            </a:pPr>
+            <a:pPr algn="l"/>
             <a:r>
               <a:rPr sz="1400" b="0">
                 <a:solidFill>
-                  <a:srgbClr val="595959"/>
-                </a:solidFill>
-                <a:latin typeface="Calibri"/>
+                  <a:srgbClr val="525146"/>
+                </a:solidFill>
+                <a:latin typeface="Source Sans Pro"/>
               </a:rPr>
               <a:t>Proves what happened</a:t>
             </a:r>
@@ -5838,13 +6633,13 @@
       </p:sp>
       <p:sp>
         <p:nvSpPr>
-          <p:cNvPr id="12" name="TextBox 11"/>
+          <p:cNvPr id="15" name="TextBox 14"/>
           <p:cNvSpPr txBox="1"/>
           <p:nvPr/>
         </p:nvSpPr>
         <p:spPr>
           <a:xfrm>
-            <a:off x="4709159" y="3429000"/>
+            <a:off x="4709160" y="3429000"/>
             <a:ext cx="2926080" cy="2286000"/>
           </a:xfrm>
           <a:prstGeom prst="rect">
@@ -5853,54 +6648,42 @@
           <a:noFill/>
         </p:spPr>
         <p:txBody>
-          <a:bodyPr wrap="square">
+          <a:bodyPr wrap="square" anchor="t" lIns="0" rIns="0" tIns="0" bIns="0">
             <a:spAutoFit/>
           </a:bodyPr>
           <a:lstStyle/>
           <a:p>
-            <a:pPr algn="l" marL="256032" indent="-256032">
-              <a:spcAft>
-                <a:spcPts val="1000"/>
-              </a:spcAft>
-            </a:pPr>
+            <a:pPr algn="l"/>
             <a:r>
               <a:rPr sz="1500" b="0">
                 <a:solidFill>
-                  <a:srgbClr val="1F3864"/>
-                </a:solidFill>
-                <a:latin typeface="Calibri"/>
+                  <a:srgbClr val="36362F"/>
+                </a:solidFill>
+                <a:latin typeface="Source Sans Pro"/>
               </a:rPr>
               <a:t>•  Provenance ledger</a:t>
             </a:r>
           </a:p>
           <a:p>
-            <a:pPr algn="l" marL="256032" indent="-256032">
-              <a:spcAft>
-                <a:spcPts val="1000"/>
-              </a:spcAft>
-            </a:pPr>
+            <a:pPr algn="l"/>
             <a:r>
               <a:rPr sz="1500" b="0">
                 <a:solidFill>
-                  <a:srgbClr val="1F3864"/>
-                </a:solidFill>
-                <a:latin typeface="Calibri"/>
+                  <a:srgbClr val="36362F"/>
+                </a:solidFill>
+                <a:latin typeface="Source Sans Pro"/>
               </a:rPr>
               <a:t>•  Traceability matrix</a:t>
             </a:r>
           </a:p>
           <a:p>
-            <a:pPr algn="l" marL="256032" indent="-256032">
-              <a:spcAft>
-                <a:spcPts val="1000"/>
-              </a:spcAft>
-            </a:pPr>
+            <a:pPr algn="l"/>
             <a:r>
               <a:rPr sz="1500" b="0">
                 <a:solidFill>
-                  <a:srgbClr val="1F3864"/>
-                </a:solidFill>
-                <a:latin typeface="Calibri"/>
+                  <a:srgbClr val="36362F"/>
+                </a:solidFill>
+                <a:latin typeface="Source Sans Pro"/>
               </a:rPr>
               <a:t>•  Activity log</a:t>
             </a:r>
@@ -5909,7 +6692,7 @@
       </p:sp>
       <p:sp>
         <p:nvSpPr>
-          <p:cNvPr id="13" name="Rounded Rectangle 12"/>
+          <p:cNvPr id="16" name="Rectangle 15"/>
           <p:cNvSpPr/>
           <p:nvPr/>
         </p:nvSpPr>
@@ -5918,15 +6701,15 @@
             <a:off x="8046720" y="1874519"/>
             <a:ext cx="3429000" cy="3977639"/>
           </a:xfrm>
-          <a:prstGeom prst="roundRect">
+          <a:prstGeom prst="rect">
             <a:avLst/>
           </a:prstGeom>
           <a:solidFill>
-            <a:srgbClr val="F2F5FA"/>
+            <a:srgbClr val="FFFFFF"/>
           </a:solidFill>
-          <a:ln>
+          <a:ln w="12700">
             <a:solidFill>
-              <a:srgbClr val="D5DEEA"/>
+              <a:srgbClr val="D2D2CF"/>
             </a:solidFill>
           </a:ln>
           <a:effectLst/>
@@ -5948,12 +6731,14 @@
         <p:txBody>
           <a:bodyPr rtlCol="0" anchor="ctr"/>
           <a:lstStyle/>
-          <a:p/>
-        </p:txBody>
-      </p:sp>
-      <p:sp>
-        <p:nvSpPr>
-          <p:cNvPr id="14" name="Rounded Rectangle 13"/>
+          <a:p>
+            <a:pPr algn="ctr"/>
+          </a:p>
+        </p:txBody>
+      </p:sp>
+      <p:sp>
+        <p:nvSpPr>
+          <p:cNvPr id="17" name="Rectangle 16"/>
           <p:cNvSpPr/>
           <p:nvPr/>
         </p:nvSpPr>
@@ -5962,11 +6747,11 @@
             <a:off x="8275320" y="2148840"/>
             <a:ext cx="2971800" cy="548640"/>
           </a:xfrm>
-          <a:prstGeom prst="roundRect">
+          <a:prstGeom prst="rect">
             <a:avLst/>
           </a:prstGeom>
           <a:solidFill>
-            <a:srgbClr val="BF8F00"/>
+            <a:srgbClr val="125C43"/>
           </a:solidFill>
           <a:ln>
             <a:noFill/>
@@ -5988,16 +6773,42 @@
           </a:fontRef>
         </p:style>
         <p:txBody>
-          <a:bodyPr rtlCol="0" anchor="ctr" wrap="square" lIns="45720" rIns="45720"/>
+          <a:bodyPr rtlCol="0" anchor="ctr"/>
           <a:lstStyle/>
           <a:p>
             <a:pPr algn="ctr"/>
-            <a:r>
-              <a:rPr sz="1600" b="1">
+          </a:p>
+        </p:txBody>
+      </p:sp>
+      <p:sp>
+        <p:nvSpPr>
+          <p:cNvPr id="18" name="TextBox 17"/>
+          <p:cNvSpPr txBox="1"/>
+          <p:nvPr/>
+        </p:nvSpPr>
+        <p:spPr>
+          <a:xfrm>
+            <a:off x="8275320" y="2148840"/>
+            <a:ext cx="2971800" cy="548640"/>
+          </a:xfrm>
+          <a:prstGeom prst="rect">
+            <a:avLst/>
+          </a:prstGeom>
+          <a:noFill/>
+        </p:spPr>
+        <p:txBody>
+          <a:bodyPr wrap="square" anchor="ctr" lIns="0" rIns="0" tIns="0" bIns="0">
+            <a:spAutoFit/>
+          </a:bodyPr>
+          <a:lstStyle/>
+          <a:p>
+            <a:pPr algn="ctr"/>
+            <a:r>
+              <a:rPr sz="1500" b="1">
                 <a:solidFill>
                   <a:srgbClr val="FFFFFF"/>
                 </a:solidFill>
-                <a:latin typeface="Calibri"/>
+                <a:latin typeface="Source Sans Pro"/>
               </a:rPr>
               <a:t>FOUNDATION</a:t>
             </a:r>
@@ -6006,7 +6817,7 @@
       </p:sp>
       <p:sp>
         <p:nvSpPr>
-          <p:cNvPr id="15" name="TextBox 14"/>
+          <p:cNvPr id="19" name="TextBox 18"/>
           <p:cNvSpPr txBox="1"/>
           <p:nvPr/>
         </p:nvSpPr>
@@ -6021,22 +6832,18 @@
           <a:noFill/>
         </p:spPr>
         <p:txBody>
-          <a:bodyPr wrap="square">
+          <a:bodyPr wrap="square" anchor="t" lIns="0" rIns="0" tIns="0" bIns="0">
             <a:spAutoFit/>
           </a:bodyPr>
           <a:lstStyle/>
           <a:p>
-            <a:pPr algn="ctr">
-              <a:spcAft>
-                <a:spcPts val="800"/>
-              </a:spcAft>
-            </a:pPr>
+            <a:pPr algn="l"/>
             <a:r>
               <a:rPr sz="1400" b="0">
                 <a:solidFill>
-                  <a:srgbClr val="595959"/>
-                </a:solidFill>
-                <a:latin typeface="Calibri"/>
+                  <a:srgbClr val="525146"/>
+                </a:solidFill>
+                <a:latin typeface="Source Sans Pro"/>
               </a:rPr>
               <a:t>Makes it repeatable</a:t>
             </a:r>
@@ -6045,7 +6852,7 @@
       </p:sp>
       <p:sp>
         <p:nvSpPr>
-          <p:cNvPr id="16" name="TextBox 15"/>
+          <p:cNvPr id="20" name="TextBox 19"/>
           <p:cNvSpPr txBox="1"/>
           <p:nvPr/>
         </p:nvSpPr>
@@ -6060,54 +6867,42 @@
           <a:noFill/>
         </p:spPr>
         <p:txBody>
-          <a:bodyPr wrap="square">
+          <a:bodyPr wrap="square" anchor="t" lIns="0" rIns="0" tIns="0" bIns="0">
             <a:spAutoFit/>
           </a:bodyPr>
           <a:lstStyle/>
           <a:p>
-            <a:pPr algn="l" marL="256032" indent="-256032">
-              <a:spcAft>
-                <a:spcPts val="1000"/>
-              </a:spcAft>
-            </a:pPr>
+            <a:pPr algn="l"/>
             <a:r>
               <a:rPr sz="1500" b="0">
                 <a:solidFill>
-                  <a:srgbClr val="1F3864"/>
-                </a:solidFill>
-                <a:latin typeface="Calibri"/>
+                  <a:srgbClr val="36362F"/>
+                </a:solidFill>
+                <a:latin typeface="Source Sans Pro"/>
               </a:rPr>
               <a:t>•  Four-layer architecture</a:t>
             </a:r>
           </a:p>
           <a:p>
-            <a:pPr algn="l" marL="256032" indent="-256032">
-              <a:spcAft>
-                <a:spcPts val="1000"/>
-              </a:spcAft>
-            </a:pPr>
+            <a:pPr algn="l"/>
             <a:r>
               <a:rPr sz="1500" b="0">
                 <a:solidFill>
-                  <a:srgbClr val="1F3864"/>
-                </a:solidFill>
-                <a:latin typeface="Calibri"/>
+                  <a:srgbClr val="36362F"/>
+                </a:solidFill>
+                <a:latin typeface="Source Sans Pro"/>
               </a:rPr>
               <a:t>•  Story quality standards</a:t>
             </a:r>
           </a:p>
           <a:p>
-            <a:pPr algn="l" marL="256032" indent="-256032">
-              <a:spcAft>
-                <a:spcPts val="1000"/>
-              </a:spcAft>
-            </a:pPr>
+            <a:pPr algn="l"/>
             <a:r>
               <a:rPr sz="1500" b="0">
                 <a:solidFill>
-                  <a:srgbClr val="1F3864"/>
-                </a:solidFill>
-                <a:latin typeface="Calibri"/>
+                  <a:srgbClr val="36362F"/>
+                </a:solidFill>
+                <a:latin typeface="Source Sans Pro"/>
               </a:rPr>
               <a:t>•  Change management</a:t>
             </a:r>
@@ -6116,7 +6911,7 @@
       </p:sp>
       <p:sp>
         <p:nvSpPr>
-          <p:cNvPr id="17" name="TextBox 16"/>
+          <p:cNvPr id="21" name="TextBox 20"/>
           <p:cNvSpPr txBox="1"/>
           <p:nvPr/>
         </p:nvSpPr>
@@ -6131,22 +6926,18 @@
           <a:noFill/>
         </p:spPr>
         <p:txBody>
-          <a:bodyPr wrap="square">
+          <a:bodyPr wrap="square" anchor="t" lIns="0" rIns="0" tIns="0" bIns="0">
             <a:spAutoFit/>
           </a:bodyPr>
           <a:lstStyle/>
           <a:p>
-            <a:pPr algn="ctr">
-              <a:spcAft>
-                <a:spcPts val="800"/>
-              </a:spcAft>
-            </a:pPr>
+            <a:pPr algn="ctr"/>
             <a:r>
               <a:rPr sz="1700" b="1">
                 <a:solidFill>
-                  <a:srgbClr val="1F3864"/>
-                </a:solidFill>
-                <a:latin typeface="Calibri"/>
+                  <a:srgbClr val="36362F"/>
+                </a:solidFill>
+                <a:latin typeface="Source Sans Pro"/>
               </a:rPr>
               <a:t>Ten features. Three jobs. One governed pipeline.</a:t>
             </a:r>
@@ -6173,59 +6964,20 @@
       <p:grpSpPr/>
       <p:sp>
         <p:nvSpPr>
-          <p:cNvPr id="2" name="TextBox 1"/>
-          <p:cNvSpPr txBox="1"/>
-          <p:nvPr/>
-        </p:nvSpPr>
-        <p:spPr>
-          <a:xfrm>
-            <a:off x="548640" y="320040"/>
-            <a:ext cx="11064240" cy="685800"/>
-          </a:xfrm>
-          <a:prstGeom prst="rect">
-            <a:avLst/>
-          </a:prstGeom>
-          <a:noFill/>
-        </p:spPr>
-        <p:txBody>
-          <a:bodyPr wrap="square">
-            <a:spAutoFit/>
-          </a:bodyPr>
-          <a:lstStyle/>
-          <a:p>
-            <a:pPr algn="l">
-              <a:spcAft>
-                <a:spcPts val="800"/>
-              </a:spcAft>
-            </a:pPr>
-            <a:r>
-              <a:rPr sz="3400" b="1">
-                <a:solidFill>
-                  <a:srgbClr val="1F3864"/>
-                </a:solidFill>
-                <a:latin typeface="Calibri"/>
-              </a:rPr>
-              <a:t>What happens next</a:t>
-            </a:r>
-          </a:p>
-        </p:txBody>
-      </p:sp>
-      <p:sp>
-        <p:nvSpPr>
-          <p:cNvPr id="3" name="Rectangle 2"/>
+          <p:cNvPr id="2" name="Rectangle 1"/>
           <p:cNvSpPr/>
           <p:nvPr/>
         </p:nvSpPr>
         <p:spPr>
           <a:xfrm>
-            <a:off x="594360" y="987552"/>
-            <a:ext cx="2011680" cy="38100"/>
+            <a:off x="0" y="0"/>
+            <a:ext cx="12191695" cy="6858000"/>
           </a:xfrm>
           <a:prstGeom prst="rect">
             <a:avLst/>
           </a:prstGeom>
           <a:solidFill>
-            <a:srgbClr val="2E74B5"/>
+            <a:srgbClr val="F0F0EC"/>
           </a:solidFill>
           <a:ln>
             <a:noFill/>
@@ -6256,14 +7008,14 @@
       </p:sp>
       <p:sp>
         <p:nvSpPr>
-          <p:cNvPr id="4" name="TextBox 3"/>
+          <p:cNvPr id="3" name="TextBox 2"/>
           <p:cNvSpPr txBox="1"/>
           <p:nvPr/>
         </p:nvSpPr>
         <p:spPr>
           <a:xfrm>
-            <a:off x="822960" y="1737360"/>
-            <a:ext cx="10515600" cy="3291840"/>
+            <a:off x="548640" y="320040"/>
+            <a:ext cx="11064240" cy="685800"/>
           </a:xfrm>
           <a:prstGeom prst="rect">
             <a:avLst/>
@@ -6271,92 +7023,40 @@
           <a:noFill/>
         </p:spPr>
         <p:txBody>
-          <a:bodyPr wrap="square">
+          <a:bodyPr wrap="square" anchor="t" lIns="0" rIns="0" tIns="0" bIns="0">
             <a:spAutoFit/>
           </a:bodyPr>
           <a:lstStyle/>
           <a:p>
-            <a:pPr algn="l" marL="256032" indent="-256032">
-              <a:spcAft>
-                <a:spcPts val="1800"/>
-              </a:spcAft>
-            </a:pPr>
-            <a:r>
-              <a:rPr sz="2100" b="0">
-                <a:solidFill>
-                  <a:srgbClr val="1F3864"/>
-                </a:solidFill>
-                <a:latin typeface="Calibri"/>
+            <a:pPr algn="l"/>
+            <a:r>
+              <a:rPr sz="3400" b="1">
+                <a:solidFill>
+                  <a:srgbClr val="36362F"/>
+                </a:solidFill>
+                <a:latin typeface="Source Sans Pro"/>
               </a:rPr>
-              <a:t>•  We build these ten capabilities point by point, in priority order.</a:t>
-            </a:r>
-          </a:p>
-          <a:p>
-            <a:pPr algn="l" marL="256032" indent="-256032">
-              <a:spcAft>
-                <a:spcPts val="1800"/>
-              </a:spcAft>
-            </a:pPr>
-            <a:r>
-              <a:rPr sz="2100" b="0">
-                <a:solidFill>
-                  <a:srgbClr val="1F3864"/>
-                </a:solidFill>
-                <a:latin typeface="Calibri"/>
-              </a:rPr>
-              <a:t>•  Every stage ends with something that runs — a working demo, not a slide.</a:t>
-            </a:r>
-          </a:p>
-          <a:p>
-            <a:pPr algn="l" marL="256032" indent="-256032">
-              <a:spcAft>
-                <a:spcPts val="1800"/>
-              </a:spcAft>
-            </a:pPr>
-            <a:r>
-              <a:rPr sz="2100" b="0">
-                <a:solidFill>
-                  <a:srgbClr val="1F3864"/>
-                </a:solidFill>
-                <a:latin typeface="Calibri"/>
-              </a:rPr>
-              <a:t>•  Anything simulated is clearly labelled as simulated. What you see live is real.</a:t>
-            </a:r>
-          </a:p>
-          <a:p>
-            <a:pPr algn="l" marL="256032" indent="-256032">
-              <a:spcAft>
-                <a:spcPts val="1800"/>
-              </a:spcAft>
-            </a:pPr>
-            <a:r>
-              <a:rPr sz="2100" b="0">
-                <a:solidFill>
-                  <a:srgbClr val="1F3864"/>
-                </a:solidFill>
-                <a:latin typeface="Calibri"/>
-              </a:rPr>
-              <a:t>•  Human checkpoints stay on until a workflow has proven itself — autonomy is earned, not assumed.</a:t>
-            </a:r>
-          </a:p>
-        </p:txBody>
-      </p:sp>
-      <p:sp>
-        <p:nvSpPr>
-          <p:cNvPr id="5" name="Rounded Rectangle 4"/>
+              <a:t>What happens next</a:t>
+            </a:r>
+          </a:p>
+        </p:txBody>
+      </p:sp>
+      <p:sp>
+        <p:nvSpPr>
+          <p:cNvPr id="4" name="Rectangle 3"/>
           <p:cNvSpPr/>
           <p:nvPr/>
         </p:nvSpPr>
         <p:spPr>
           <a:xfrm>
-            <a:off x="822960" y="5257800"/>
-            <a:ext cx="10515600" cy="868680"/>
-          </a:xfrm>
-          <a:prstGeom prst="roundRect">
+            <a:off x="594360" y="987552"/>
+            <a:ext cx="732536" cy="38100"/>
+          </a:xfrm>
+          <a:prstGeom prst="rect">
             <a:avLst/>
           </a:prstGeom>
           <a:solidFill>
-            <a:srgbClr val="1F3864"/>
+            <a:srgbClr val="A20A29"/>
           </a:solidFill>
           <a:ln>
             <a:noFill/>
@@ -6378,16 +7078,157 @@
           </a:fontRef>
         </p:style>
         <p:txBody>
-          <a:bodyPr rtlCol="0" anchor="ctr" wrap="square" lIns="320040" rIns="320040"/>
+          <a:bodyPr rtlCol="0" anchor="ctr"/>
           <a:lstStyle/>
           <a:p>
             <a:pPr algn="ctr"/>
+          </a:p>
+        </p:txBody>
+      </p:sp>
+      <p:sp>
+        <p:nvSpPr>
+          <p:cNvPr id="5" name="TextBox 4"/>
+          <p:cNvSpPr txBox="1"/>
+          <p:nvPr/>
+        </p:nvSpPr>
+        <p:spPr>
+          <a:xfrm>
+            <a:off x="822960" y="1737360"/>
+            <a:ext cx="10515600" cy="3291840"/>
+          </a:xfrm>
+          <a:prstGeom prst="rect">
+            <a:avLst/>
+          </a:prstGeom>
+          <a:noFill/>
+        </p:spPr>
+        <p:txBody>
+          <a:bodyPr wrap="square" anchor="t" lIns="0" rIns="0" tIns="0" bIns="0">
+            <a:spAutoFit/>
+          </a:bodyPr>
+          <a:lstStyle/>
+          <a:p>
+            <a:pPr algn="l"/>
+            <a:r>
+              <a:rPr sz="2100" b="0">
+                <a:solidFill>
+                  <a:srgbClr val="36362F"/>
+                </a:solidFill>
+                <a:latin typeface="Source Sans Pro"/>
+              </a:rPr>
+              <a:t>•  We build these ten capabilities point by point, in priority order.</a:t>
+            </a:r>
+          </a:p>
+          <a:p>
+            <a:pPr algn="l"/>
+            <a:r>
+              <a:rPr sz="2100" b="0">
+                <a:solidFill>
+                  <a:srgbClr val="36362F"/>
+                </a:solidFill>
+                <a:latin typeface="Source Sans Pro"/>
+              </a:rPr>
+              <a:t>•  Every stage ends with something that runs — a working demo, not a slide.</a:t>
+            </a:r>
+          </a:p>
+          <a:p>
+            <a:pPr algn="l"/>
+            <a:r>
+              <a:rPr sz="2100" b="0">
+                <a:solidFill>
+                  <a:srgbClr val="36362F"/>
+                </a:solidFill>
+                <a:latin typeface="Source Sans Pro"/>
+              </a:rPr>
+              <a:t>•  Anything simulated is clearly labelled as simulated. What you see live is real.</a:t>
+            </a:r>
+          </a:p>
+          <a:p>
+            <a:pPr algn="l"/>
+            <a:r>
+              <a:rPr sz="2100" b="0">
+                <a:solidFill>
+                  <a:srgbClr val="36362F"/>
+                </a:solidFill>
+                <a:latin typeface="Source Sans Pro"/>
+              </a:rPr>
+              <a:t>•  Human checkpoints stay on until a workflow has proven itself — autonomy is earned, not assumed.</a:t>
+            </a:r>
+          </a:p>
+        </p:txBody>
+      </p:sp>
+      <p:sp>
+        <p:nvSpPr>
+          <p:cNvPr id="6" name="Rectangle 5"/>
+          <p:cNvSpPr/>
+          <p:nvPr/>
+        </p:nvSpPr>
+        <p:spPr>
+          <a:xfrm>
+            <a:off x="822960" y="5257800"/>
+            <a:ext cx="10515600" cy="868680"/>
+          </a:xfrm>
+          <a:prstGeom prst="rect">
+            <a:avLst/>
+          </a:prstGeom>
+          <a:solidFill>
+            <a:srgbClr val="A20A29"/>
+          </a:solidFill>
+          <a:ln>
+            <a:noFill/>
+          </a:ln>
+          <a:effectLst/>
+        </p:spPr>
+        <p:style>
+          <a:lnRef idx="1">
+            <a:schemeClr val="accent1"/>
+          </a:lnRef>
+          <a:fillRef idx="3">
+            <a:schemeClr val="accent1"/>
+          </a:fillRef>
+          <a:effectRef idx="2">
+            <a:schemeClr val="accent1"/>
+          </a:effectRef>
+          <a:fontRef idx="minor">
+            <a:schemeClr val="lt1"/>
+          </a:fontRef>
+        </p:style>
+        <p:txBody>
+          <a:bodyPr rtlCol="0" anchor="ctr"/>
+          <a:lstStyle/>
+          <a:p>
+            <a:pPr algn="ctr"/>
+          </a:p>
+        </p:txBody>
+      </p:sp>
+      <p:sp>
+        <p:nvSpPr>
+          <p:cNvPr id="7" name="TextBox 6"/>
+          <p:cNvSpPr txBox="1"/>
+          <p:nvPr/>
+        </p:nvSpPr>
+        <p:spPr>
+          <a:xfrm>
+            <a:off x="822960" y="5257800"/>
+            <a:ext cx="10515600" cy="868680"/>
+          </a:xfrm>
+          <a:prstGeom prst="rect">
+            <a:avLst/>
+          </a:prstGeom>
+          <a:noFill/>
+        </p:spPr>
+        <p:txBody>
+          <a:bodyPr wrap="square" anchor="ctr" lIns="0" rIns="0" tIns="0" bIns="0">
+            <a:spAutoFit/>
+          </a:bodyPr>
+          <a:lstStyle/>
+          <a:p>
+            <a:pPr algn="ctr"/>
             <a:r>
               <a:rPr sz="1700" b="1">
                 <a:solidFill>
                   <a:srgbClr val="FFFFFF"/>
                 </a:solidFill>
-                <a:latin typeface="Calibri"/>
+                <a:latin typeface="Source Sans Pro"/>
               </a:rPr>
               <a:t>You will see the pipeline run end to end, watch a gate block bad work, and trace an output back to its requirement.</a:t>
             </a:r>
@@ -6427,7 +7268,7 @@
             <a:avLst/>
           </a:prstGeom>
           <a:solidFill>
-            <a:srgbClr val="1F3864"/>
+            <a:srgbClr val="36362F"/>
           </a:solidFill>
           <a:ln>
             <a:noFill/>
@@ -6465,7 +7306,7 @@
         <p:spPr>
           <a:xfrm>
             <a:off x="1097280" y="2103120"/>
-            <a:ext cx="9966960" cy="2743200"/>
+            <a:ext cx="9966960" cy="457200"/>
           </a:xfrm>
           <a:prstGeom prst="rect">
             <a:avLst/>
@@ -6473,70 +7314,167 @@
           <a:noFill/>
         </p:spPr>
         <p:txBody>
-          <a:bodyPr wrap="square">
+          <a:bodyPr wrap="square" anchor="t" lIns="0" rIns="0" tIns="0" bIns="0">
             <a:spAutoFit/>
           </a:bodyPr>
           <a:lstStyle/>
           <a:p>
-            <a:pPr algn="l">
-              <a:spcAft>
-                <a:spcPts val="1600"/>
-              </a:spcAft>
-            </a:pPr>
+            <a:pPr algn="l"/>
             <a:r>
               <a:rPr sz="1800" b="1">
                 <a:solidFill>
-                  <a:srgbClr val="8FA8C8"/>
-                </a:solidFill>
-                <a:latin typeface="Calibri"/>
+                  <a:srgbClr val="E3C9CE"/>
+                </a:solidFill>
+                <a:latin typeface="Source Sans Pro"/>
               </a:rPr>
               <a:t>THE TAKEAWAY</a:t>
             </a:r>
           </a:p>
-          <a:p>
-            <a:pPr algn="l">
-              <a:spcAft>
-                <a:spcPts val="400"/>
-              </a:spcAft>
-            </a:pPr>
+        </p:txBody>
+      </p:sp>
+      <p:sp>
+        <p:nvSpPr>
+          <p:cNvPr id="4" name="TextBox 3"/>
+          <p:cNvSpPr txBox="1"/>
+          <p:nvPr/>
+        </p:nvSpPr>
+        <p:spPr>
+          <a:xfrm>
+            <a:off x="1097280" y="2560320"/>
+            <a:ext cx="9966960" cy="914400"/>
+          </a:xfrm>
+          <a:prstGeom prst="rect">
+            <a:avLst/>
+          </a:prstGeom>
+          <a:noFill/>
+        </p:spPr>
+        <p:txBody>
+          <a:bodyPr wrap="square" anchor="t" lIns="0" rIns="0" tIns="0" bIns="0">
+            <a:spAutoFit/>
+          </a:bodyPr>
+          <a:lstStyle/>
+          <a:p>
+            <a:pPr algn="l"/>
             <a:r>
               <a:rPr sz="4400" b="1">
                 <a:solidFill>
                   <a:srgbClr val="FFFFFF"/>
                 </a:solidFill>
-                <a:latin typeface="Calibri"/>
+                <a:latin typeface="Source Sans Pro"/>
               </a:rPr>
               <a:t>Speed from AI.</a:t>
             </a:r>
           </a:p>
-          <a:p>
-            <a:pPr algn="l">
-              <a:spcAft>
-                <a:spcPts val="2200"/>
-              </a:spcAft>
-            </a:pPr>
+        </p:txBody>
+      </p:sp>
+      <p:sp>
+        <p:nvSpPr>
+          <p:cNvPr id="5" name="TextBox 4"/>
+          <p:cNvSpPr txBox="1"/>
+          <p:nvPr/>
+        </p:nvSpPr>
+        <p:spPr>
+          <a:xfrm>
+            <a:off x="1097280" y="3200400"/>
+            <a:ext cx="9966960" cy="914400"/>
+          </a:xfrm>
+          <a:prstGeom prst="rect">
+            <a:avLst/>
+          </a:prstGeom>
+          <a:noFill/>
+        </p:spPr>
+        <p:txBody>
+          <a:bodyPr wrap="square" anchor="t" lIns="0" rIns="0" tIns="0" bIns="0">
+            <a:spAutoFit/>
+          </a:bodyPr>
+          <a:lstStyle/>
+          <a:p>
+            <a:pPr algn="l"/>
             <a:r>
               <a:rPr sz="4400" b="1">
                 <a:solidFill>
                   <a:srgbClr val="FFFFFF"/>
                 </a:solidFill>
-                <a:latin typeface="Calibri"/>
+                <a:latin typeface="Source Sans Pro"/>
               </a:rPr>
               <a:t>Confidence from governance.</a:t>
             </a:r>
           </a:p>
-          <a:p>
-            <a:pPr algn="l">
-              <a:spcAft>
-                <a:spcPts val="800"/>
-              </a:spcAft>
-            </a:pPr>
-            <a:r>
-              <a:rPr sz="2100" b="0">
-                <a:solidFill>
-                  <a:srgbClr val="BDD0E9"/>
-                </a:solidFill>
-                <a:latin typeface="Calibri"/>
+        </p:txBody>
+      </p:sp>
+      <p:sp>
+        <p:nvSpPr>
+          <p:cNvPr id="6" name="Rectangle 5"/>
+          <p:cNvSpPr/>
+          <p:nvPr/>
+        </p:nvSpPr>
+        <p:spPr>
+          <a:xfrm>
+            <a:off x="1097280" y="4200000"/>
+            <a:ext cx="2011680" cy="38100"/>
+          </a:xfrm>
+          <a:prstGeom prst="rect">
+            <a:avLst/>
+          </a:prstGeom>
+          <a:solidFill>
+            <a:srgbClr val="A20A29"/>
+          </a:solidFill>
+          <a:ln>
+            <a:noFill/>
+          </a:ln>
+          <a:effectLst/>
+        </p:spPr>
+        <p:style>
+          <a:lnRef idx="1">
+            <a:schemeClr val="accent1"/>
+          </a:lnRef>
+          <a:fillRef idx="3">
+            <a:schemeClr val="accent1"/>
+          </a:fillRef>
+          <a:effectRef idx="2">
+            <a:schemeClr val="accent1"/>
+          </a:effectRef>
+          <a:fontRef idx="minor">
+            <a:schemeClr val="lt1"/>
+          </a:fontRef>
+        </p:style>
+        <p:txBody>
+          <a:bodyPr rtlCol="0" anchor="ctr"/>
+          <a:lstStyle/>
+          <a:p>
+            <a:pPr algn="ctr"/>
+          </a:p>
+        </p:txBody>
+      </p:sp>
+      <p:sp>
+        <p:nvSpPr>
+          <p:cNvPr id="7" name="TextBox 6"/>
+          <p:cNvSpPr txBox="1"/>
+          <p:nvPr/>
+        </p:nvSpPr>
+        <p:spPr>
+          <a:xfrm>
+            <a:off x="1097280" y="4400000"/>
+            <a:ext cx="9966960" cy="731520"/>
+          </a:xfrm>
+          <a:prstGeom prst="rect">
+            <a:avLst/>
+          </a:prstGeom>
+          <a:noFill/>
+        </p:spPr>
+        <p:txBody>
+          <a:bodyPr wrap="square" anchor="t" lIns="0" rIns="0" tIns="0" bIns="0">
+            <a:spAutoFit/>
+          </a:bodyPr>
+          <a:lstStyle/>
+          <a:p>
+            <a:pPr algn="l"/>
+            <a:r>
+              <a:rPr sz="2000" b="0">
+                <a:solidFill>
+                  <a:srgbClr val="E3C9CE"/>
+                </a:solidFill>
+                <a:latin typeface="Source Sans Pro"/>
               </a:rPr>
               <a:t>Every artifact gated, logged, and traceable — and a human always holds the final approval.</a:t>
             </a:r>
